--- a/Last/LEC/07-2_RNN.pptx
+++ b/Last/LEC/07-2_RNN.pptx
@@ -280,7 +280,7 @@
           <a:p>
             <a:fld id="{A76E1671-358D-4BAB-9EB2-DC8D65251B89}" type="datetimeFigureOut">
               <a:rPr lang="en-US" smtClean="0"/>
-              <a:t>8/29/2025</a:t>
+              <a:t>5/29/26</a:t>
             </a:fld>
             <a:endParaRPr lang="en-US"/>
           </a:p>
@@ -480,7 +480,7 @@
           <a:p>
             <a:fld id="{A76E1671-358D-4BAB-9EB2-DC8D65251B89}" type="datetimeFigureOut">
               <a:rPr lang="en-US" smtClean="0"/>
-              <a:t>8/29/2025</a:t>
+              <a:t>5/29/26</a:t>
             </a:fld>
             <a:endParaRPr lang="en-US"/>
           </a:p>
@@ -690,7 +690,7 @@
           <a:p>
             <a:fld id="{A76E1671-358D-4BAB-9EB2-DC8D65251B89}" type="datetimeFigureOut">
               <a:rPr lang="en-US" smtClean="0"/>
-              <a:t>8/29/2025</a:t>
+              <a:t>5/29/26</a:t>
             </a:fld>
             <a:endParaRPr lang="en-US"/>
           </a:p>
@@ -890,7 +890,7 @@
           <a:p>
             <a:fld id="{A76E1671-358D-4BAB-9EB2-DC8D65251B89}" type="datetimeFigureOut">
               <a:rPr lang="en-US" smtClean="0"/>
-              <a:t>8/29/2025</a:t>
+              <a:t>5/29/26</a:t>
             </a:fld>
             <a:endParaRPr lang="en-US"/>
           </a:p>
@@ -1166,7 +1166,7 @@
           <a:p>
             <a:fld id="{A76E1671-358D-4BAB-9EB2-DC8D65251B89}" type="datetimeFigureOut">
               <a:rPr lang="en-US" smtClean="0"/>
-              <a:t>8/29/2025</a:t>
+              <a:t>5/29/26</a:t>
             </a:fld>
             <a:endParaRPr lang="en-US"/>
           </a:p>
@@ -1434,7 +1434,7 @@
           <a:p>
             <a:fld id="{A76E1671-358D-4BAB-9EB2-DC8D65251B89}" type="datetimeFigureOut">
               <a:rPr lang="en-US" smtClean="0"/>
-              <a:t>8/29/2025</a:t>
+              <a:t>5/29/26</a:t>
             </a:fld>
             <a:endParaRPr lang="en-US"/>
           </a:p>
@@ -1849,7 +1849,7 @@
           <a:p>
             <a:fld id="{A76E1671-358D-4BAB-9EB2-DC8D65251B89}" type="datetimeFigureOut">
               <a:rPr lang="en-US" smtClean="0"/>
-              <a:t>8/29/2025</a:t>
+              <a:t>5/29/26</a:t>
             </a:fld>
             <a:endParaRPr lang="en-US"/>
           </a:p>
@@ -1991,7 +1991,7 @@
           <a:p>
             <a:fld id="{A76E1671-358D-4BAB-9EB2-DC8D65251B89}" type="datetimeFigureOut">
               <a:rPr lang="en-US" smtClean="0"/>
-              <a:t>8/29/2025</a:t>
+              <a:t>5/29/26</a:t>
             </a:fld>
             <a:endParaRPr lang="en-US"/>
           </a:p>
@@ -2104,7 +2104,7 @@
           <a:p>
             <a:fld id="{A76E1671-358D-4BAB-9EB2-DC8D65251B89}" type="datetimeFigureOut">
               <a:rPr lang="en-US" smtClean="0"/>
-              <a:t>8/29/2025</a:t>
+              <a:t>5/29/26</a:t>
             </a:fld>
             <a:endParaRPr lang="en-US"/>
           </a:p>
@@ -2417,7 +2417,7 @@
           <a:p>
             <a:fld id="{A76E1671-358D-4BAB-9EB2-DC8D65251B89}" type="datetimeFigureOut">
               <a:rPr lang="en-US" smtClean="0"/>
-              <a:t>8/29/2025</a:t>
+              <a:t>5/29/26</a:t>
             </a:fld>
             <a:endParaRPr lang="en-US"/>
           </a:p>
@@ -2706,7 +2706,7 @@
           <a:p>
             <a:fld id="{A76E1671-358D-4BAB-9EB2-DC8D65251B89}" type="datetimeFigureOut">
               <a:rPr lang="en-US" smtClean="0"/>
-              <a:t>8/29/2025</a:t>
+              <a:t>5/29/26</a:t>
             </a:fld>
             <a:endParaRPr lang="en-US"/>
           </a:p>
@@ -2949,7 +2949,7 @@
           <a:p>
             <a:fld id="{A76E1671-358D-4BAB-9EB2-DC8D65251B89}" type="datetimeFigureOut">
               <a:rPr lang="en-US" smtClean="0"/>
-              <a:t>8/29/2025</a:t>
+              <a:t>5/29/26</a:t>
             </a:fld>
             <a:endParaRPr lang="en-US"/>
           </a:p>
@@ -3430,13 +3430,6 @@
   <p:clrMapOvr>
     <a:masterClrMapping/>
   </p:clrMapOvr>
-  <p:timing>
-    <p:tnLst>
-      <p:par>
-        <p:cTn id="1" dur="indefinite" restart="never" nodeType="tmRoot"/>
-      </p:par>
-    </p:tnLst>
-  </p:timing>
 </p:sld>
 </file>
 
@@ -3478,11 +3471,11 @@
           <a:lstStyle/>
           <a:p>
             <a:r>
-              <a:rPr lang="ru-RU" dirty="0" smtClean="0"/>
+              <a:rPr lang="ru-RU" dirty="0"/>
               <a:t>Расширение контекста </a:t>
             </a:r>
             <a:r>
-              <a:rPr lang="en-US" dirty="0" smtClean="0"/>
+              <a:rPr lang="en-US" dirty="0"/>
               <a:t>RNN</a:t>
             </a:r>
             <a:endParaRPr lang="ru-RU" dirty="0"/>
@@ -3515,13 +3508,13 @@
               <a:buNone/>
             </a:pPr>
             <a:r>
-              <a:rPr lang="ru-RU" dirty="0" smtClean="0"/>
+              <a:rPr lang="ru-RU" dirty="0"/>
               <a:t>Во временных рядах контекста – это паттерны поведения, влияющие на прогноз ВР. </a:t>
             </a:r>
           </a:p>
           <a:p>
             <a:r>
-              <a:rPr lang="ru-RU" sz="2400" dirty="0" smtClean="0"/>
+              <a:rPr lang="ru-RU" sz="2400" dirty="0"/>
               <a:t>Усечение обучение – потеря контекста. Нужно увеличивать контекст. Подходы:</a:t>
             </a:r>
           </a:p>
@@ -3535,23 +3528,23 @@
               </a:spcBef>
             </a:pPr>
             <a:r>
-              <a:rPr lang="ru-RU" dirty="0" smtClean="0"/>
+              <a:rPr lang="ru-RU" dirty="0"/>
               <a:t>Регуляризация обучения</a:t>
             </a:r>
             <a:r>
-              <a:rPr lang="en-US" dirty="0" smtClean="0"/>
+              <a:rPr lang="en-US" dirty="0"/>
               <a:t> </a:t>
             </a:r>
             <a:r>
-              <a:rPr lang="ru-RU" dirty="0" smtClean="0"/>
+              <a:rPr lang="ru-RU" dirty="0"/>
               <a:t>(</a:t>
             </a:r>
             <a:r>
-              <a:rPr lang="ru-RU" dirty="0" err="1" smtClean="0"/>
+              <a:rPr lang="ru-RU" dirty="0" err="1"/>
               <a:t>батч</a:t>
             </a:r>
             <a:r>
-              <a:rPr lang="ru-RU" dirty="0" smtClean="0"/>
+              <a:rPr lang="ru-RU" dirty="0"/>
               <a:t>-норма, L1, L2, и т. д.).</a:t>
             </a:r>
           </a:p>
@@ -3565,21 +3558,21 @@
               </a:spcBef>
             </a:pPr>
             <a:r>
-              <a:rPr lang="en-US" dirty="0" smtClean="0"/>
+              <a:rPr lang="en-US" dirty="0"/>
               <a:t>Temporal learning </a:t>
             </a:r>
             <a:r>
-              <a:rPr lang="ru-RU" dirty="0" smtClean="0"/>
+              <a:rPr lang="ru-RU" dirty="0"/>
               <a:t>(последовательные слои с разряженным окном)</a:t>
             </a:r>
           </a:p>
           <a:p>
             <a:pPr lvl="1"/>
             <a:r>
-              <a:rPr lang="ru-RU" dirty="0" smtClean="0"/>
+              <a:rPr lang="ru-RU" dirty="0"/>
               <a:t>Специальные модификации рекуррентных ячеек </a:t>
             </a:r>
-            <a:endParaRPr lang="en-US" dirty="0" smtClean="0"/>
+            <a:endParaRPr lang="en-US" dirty="0"/>
           </a:p>
         </p:txBody>
       </p:sp>
@@ -3658,13 +3651,6 @@
   <p:clrMapOvr>
     <a:masterClrMapping/>
   </p:clrMapOvr>
-  <p:timing>
-    <p:tnLst>
-      <p:par>
-        <p:cTn id="1" dur="indefinite" restart="never" nodeType="tmRoot"/>
-      </p:par>
-    </p:tnLst>
-  </p:timing>
 </p:sld>
 </file>
 
@@ -3706,11 +3692,11 @@
           <a:lstStyle/>
           <a:p>
             <a:r>
-              <a:rPr lang="en-US" dirty="0" err="1" smtClean="0"/>
+              <a:rPr lang="en-US" dirty="0" err="1"/>
               <a:t>BiDiretional</a:t>
             </a:r>
             <a:r>
-              <a:rPr lang="en-US" dirty="0" smtClean="0"/>
+              <a:rPr lang="en-US" dirty="0"/>
               <a:t> RNN</a:t>
             </a:r>
             <a:endParaRPr lang="ru-RU" dirty="0"/>
@@ -3745,15 +3731,15 @@
                   <a:buNone/>
                 </a:pPr>
                 <a:r>
-                  <a:rPr lang="ru-RU" sz="2200" dirty="0" smtClean="0"/>
+                  <a:rPr lang="ru-RU" sz="2200" dirty="0"/>
                   <a:t>Особенность регуляризации </a:t>
                 </a:r>
                 <a:r>
-                  <a:rPr lang="en-US" sz="2200" dirty="0" smtClean="0"/>
+                  <a:rPr lang="en-US" sz="2200" dirty="0"/>
                   <a:t>RNN – </a:t>
                 </a:r>
                 <a:r>
-                  <a:rPr lang="ru-RU" sz="2200" dirty="0" smtClean="0"/>
+                  <a:rPr lang="ru-RU" sz="2200" dirty="0"/>
                   <a:t>можно использовать последовательность данных.</a:t>
                 </a:r>
               </a:p>
@@ -3762,15 +3748,15 @@
                   <a:buNone/>
                 </a:pPr>
                 <a:r>
-                  <a:rPr lang="ru-RU" sz="2200" dirty="0" smtClean="0"/>
+                  <a:rPr lang="ru-RU" sz="2200" dirty="0"/>
                   <a:t>Пусть</a:t>
                 </a:r>
                 <a:r>
-                  <a:rPr lang="en-US" sz="2200" dirty="0" smtClean="0"/>
+                  <a:rPr lang="en-US" sz="2200" dirty="0"/>
                   <a:t> </a:t>
                 </a:r>
                 <a:r>
-                  <a:rPr lang="ru-RU" sz="2200" dirty="0" smtClean="0"/>
+                  <a:rPr lang="ru-RU" sz="2200" dirty="0"/>
                   <a:t>для отрезка ВР длиной </a:t>
                 </a:r>
                 <a14:m>
@@ -3790,24 +3776,24 @@
                   </m:oMath>
                 </a14:m>
                 <a:r>
-                  <a:rPr lang="ru-RU" sz="2200" b="0" i="0" dirty="0" smtClean="0">
+                  <a:rPr lang="ru-RU" sz="2200" b="0" i="0" dirty="0">
                     <a:latin typeface="+mj-lt"/>
                   </a:rPr>
                   <a:t>(контекст)</a:t>
                 </a:r>
                 <a:r>
-                  <a:rPr lang="en-US" sz="2200" b="0" i="0" dirty="0" smtClean="0">
+                  <a:rPr lang="en-US" sz="2200" b="0" i="0" dirty="0">
                     <a:latin typeface="+mj-lt"/>
                   </a:rPr>
                   <a:t> </a:t>
                 </a:r>
                 <a:r>
-                  <a:rPr lang="ru-RU" sz="2200" b="0" i="0" dirty="0" smtClean="0">
+                  <a:rPr lang="ru-RU" sz="2200" b="0" i="0" dirty="0">
                     <a:latin typeface="+mj-lt"/>
                   </a:rPr>
                   <a:t> </a:t>
                 </a:r>
-                <a:endParaRPr lang="ru-RU" sz="2200" dirty="0" smtClean="0"/>
+                <a:endParaRPr lang="ru-RU" sz="2200" dirty="0"/>
               </a:p>
               <a:p>
                 <a:pPr marL="88900" lvl="1" indent="0">
@@ -4052,7 +4038,7 @@
                     </m:oMath>
                   </m:oMathPara>
                 </a14:m>
-                <a:endParaRPr lang="ru-RU" sz="2000" dirty="0" smtClean="0"/>
+                <a:endParaRPr lang="ru-RU" sz="2000" dirty="0"/>
               </a:p>
               <a:p>
                 <a:pPr marL="88900" lvl="1" indent="0">
@@ -4297,7 +4283,7 @@
                     </m:oMath>
                   </m:oMathPara>
                 </a14:m>
-                <a:endParaRPr lang="ru-RU" sz="2000" dirty="0" smtClean="0"/>
+                <a:endParaRPr lang="ru-RU" sz="2000" dirty="0"/>
               </a:p>
               <a:p>
                 <a:pPr marL="88900" lvl="1" indent="0" algn="ctr">
@@ -4430,10 +4416,9 @@
                   </m:oMath>
                 </a14:m>
                 <a:r>
-                  <a:rPr lang="en-US" sz="2000" dirty="0" smtClean="0"/>
+                  <a:rPr lang="en-US" sz="2000" dirty="0"/>
                   <a:t> </a:t>
                 </a:r>
-                <a:endParaRPr lang="en-US" sz="2000" dirty="0"/>
               </a:p>
             </p:txBody>
           </p:sp>
@@ -4692,7 +4677,7 @@
                   <a:buNone/>
                 </a:pPr>
                 <a:r>
-                  <a:rPr lang="ru-RU" sz="2400" dirty="0" smtClean="0"/>
+                  <a:rPr lang="ru-RU" sz="2400" dirty="0"/>
                   <a:t>где </a:t>
                 </a:r>
                 <a14:m>
@@ -4739,7 +4724,7 @@
                   </m:oMath>
                 </a14:m>
                 <a:r>
-                  <a:rPr lang="ru-RU" sz="2000" dirty="0" smtClean="0"/>
+                  <a:rPr lang="ru-RU" sz="2000" dirty="0"/>
                   <a:t> - значении вектора состояния рассчитанное слева на право (вперед); </a:t>
                 </a:r>
                 <a14:m>
@@ -4786,7 +4771,7 @@
                   </m:oMath>
                 </a14:m>
                 <a:r>
-                  <a:rPr lang="ru-RU" sz="2000" dirty="0" smtClean="0"/>
+                  <a:rPr lang="ru-RU" sz="2000" dirty="0"/>
                   <a:t> - значение рассчитанное по выборке </a:t>
                 </a:r>
                 <a14:m>
@@ -4800,7 +4785,7 @@
                   </m:oMath>
                 </a14:m>
                 <a:r>
-                  <a:rPr lang="ru-RU" sz="2000" dirty="0" smtClean="0"/>
+                  <a:rPr lang="ru-RU" sz="2000" dirty="0"/>
                   <a:t> справа на лево (корректировка </a:t>
                 </a:r>
                 <a14:m>
@@ -4847,7 +4832,7 @@
                   </m:oMath>
                 </a14:m>
                 <a:r>
-                  <a:rPr lang="ru-RU" sz="2000" dirty="0" smtClean="0"/>
+                  <a:rPr lang="ru-RU" sz="2000" dirty="0"/>
                   <a:t> на каждом шаге)</a:t>
                 </a:r>
                 <a:endParaRPr lang="en-US" sz="2000" dirty="0"/>
@@ -4986,21 +4971,6 @@
   <p:clrMapOvr>
     <a:masterClrMapping/>
   </p:clrMapOvr>
-  <mc:AlternateContent xmlns:mc="http://schemas.openxmlformats.org/markup-compatibility/2006" xmlns:p14="http://schemas.microsoft.com/office/powerpoint/2010/main">
-    <mc:Choice Requires="p14">
-      <p:transition spd="slow" p14:dur="2000"/>
-    </mc:Choice>
-    <mc:Fallback xmlns="">
-      <p:transition spd="slow"/>
-    </mc:Fallback>
-  </mc:AlternateContent>
-  <p:timing>
-    <p:tnLst>
-      <p:par>
-        <p:cTn id="1" dur="indefinite" restart="never" nodeType="tmRoot"/>
-      </p:par>
-    </p:tnLst>
-  </p:timing>
 </p:sld>
 </file>
 
@@ -5250,21 +5220,6 @@
   <p:clrMapOvr>
     <a:masterClrMapping/>
   </p:clrMapOvr>
-  <mc:AlternateContent xmlns:mc="http://schemas.openxmlformats.org/markup-compatibility/2006" xmlns:p14="http://schemas.microsoft.com/office/powerpoint/2010/main">
-    <mc:Choice Requires="p14">
-      <p:transition spd="slow" p14:dur="2000"/>
-    </mc:Choice>
-    <mc:Fallback xmlns="">
-      <p:transition spd="slow"/>
-    </mc:Fallback>
-  </mc:AlternateContent>
-  <p:timing>
-    <p:tnLst>
-      <p:par>
-        <p:cTn id="1" dur="indefinite" restart="never" nodeType="tmRoot"/>
-      </p:par>
-    </p:tnLst>
-  </p:timing>
 </p:sld>
 </file>
 
@@ -5306,11 +5261,11 @@
           <a:lstStyle/>
           <a:p>
             <a:r>
-              <a:rPr lang="ru-RU" dirty="0" smtClean="0"/>
+              <a:rPr lang="ru-RU" dirty="0"/>
               <a:t>Долгосрочно-краткосрочная </a:t>
             </a:r>
             <a:r>
-              <a:rPr lang="en-US" dirty="0" smtClean="0"/>
+              <a:rPr lang="en-US" dirty="0"/>
               <a:t>RNN = LSTM</a:t>
             </a:r>
             <a:endParaRPr lang="ru-RU" dirty="0"/>
@@ -5343,14 +5298,14 @@
               <a:buNone/>
             </a:pPr>
             <a:r>
-              <a:rPr lang="ru-RU" sz="2300" dirty="0" smtClean="0"/>
+              <a:rPr lang="ru-RU" sz="2300" dirty="0"/>
               <a:t>Контекст обучения можно увеличить, если частично его забывать.</a:t>
             </a:r>
           </a:p>
           <a:p>
             <a:pPr lvl="1"/>
             <a:r>
-              <a:rPr lang="ru-RU" sz="2300" dirty="0" smtClean="0"/>
+              <a:rPr lang="ru-RU" sz="2300" dirty="0"/>
               <a:t>Однако, как не забывать действительно важный контекст.</a:t>
             </a:r>
           </a:p>
@@ -5359,61 +5314,61 @@
               <a:buNone/>
             </a:pPr>
             <a:r>
-              <a:rPr lang="ru-RU" sz="2300" b="1" dirty="0" smtClean="0"/>
+              <a:rPr lang="ru-RU" sz="2300" b="1" dirty="0"/>
               <a:t>Идея</a:t>
             </a:r>
             <a:r>
-              <a:rPr lang="ru-RU" sz="2300" dirty="0" smtClean="0"/>
+              <a:rPr lang="ru-RU" sz="2300" dirty="0"/>
               <a:t>: ввести краткосрочное и долгоиграющее скрытые состояния. </a:t>
             </a:r>
           </a:p>
           <a:p>
             <a:pPr lvl="1"/>
             <a:r>
-              <a:rPr lang="ru-RU" sz="2300" dirty="0" smtClean="0"/>
+              <a:rPr lang="ru-RU" sz="2300" dirty="0"/>
               <a:t>Долговременный контекст – тренд + цикличность временного ряда</a:t>
             </a:r>
             <a:r>
-              <a:rPr lang="en-US" sz="2300" dirty="0" smtClean="0"/>
+              <a:rPr lang="en-US" sz="2300" dirty="0"/>
               <a:t> </a:t>
             </a:r>
             <a:r>
-              <a:rPr lang="ru-RU" sz="2300" dirty="0" smtClean="0"/>
+              <a:rPr lang="ru-RU" sz="2300" dirty="0"/>
               <a:t>(память)</a:t>
             </a:r>
           </a:p>
           <a:p>
             <a:pPr lvl="2"/>
             <a:r>
-              <a:rPr lang="ru-RU" sz="1900" dirty="0" smtClean="0"/>
+              <a:rPr lang="ru-RU" sz="1900" dirty="0"/>
               <a:t>Веса должны меняться медленно</a:t>
             </a:r>
           </a:p>
           <a:p>
             <a:pPr lvl="1"/>
             <a:r>
-              <a:rPr lang="ru-RU" sz="2300" dirty="0" smtClean="0"/>
+              <a:rPr lang="ru-RU" sz="2300" dirty="0"/>
               <a:t>Кратковременный контекст – текущая сезонность ВР (скрытое состояние)</a:t>
             </a:r>
           </a:p>
           <a:p>
             <a:pPr lvl="2"/>
             <a:r>
-              <a:rPr lang="ru-RU" sz="1900" dirty="0" smtClean="0"/>
+              <a:rPr lang="ru-RU" sz="1900" dirty="0"/>
               <a:t>Веся постоянно обновляются</a:t>
             </a:r>
           </a:p>
           <a:p>
             <a:pPr marL="265113" lvl="1"/>
             <a:r>
-              <a:rPr lang="ru-RU" sz="2300" dirty="0" smtClean="0"/>
+              <a:rPr lang="ru-RU" sz="2300" dirty="0"/>
               <a:t>Такая архитектура называется </a:t>
             </a:r>
             <a:r>
               <a:rPr lang="en-US" dirty="0"/>
               <a:t>long short-term memory (LSTM) </a:t>
             </a:r>
-            <a:endParaRPr lang="ru-RU" sz="2300" dirty="0" smtClean="0"/>
+            <a:endParaRPr lang="ru-RU" sz="2300" dirty="0"/>
           </a:p>
         </p:txBody>
       </p:sp>
@@ -5547,10 +5502,9 @@
           <a:lstStyle/>
           <a:p>
             <a:r>
-              <a:rPr lang="ru-RU" sz="1200" dirty="0" smtClean="0"/>
+              <a:rPr lang="ru-RU" sz="1200" dirty="0"/>
               <a:t>Долговременный контекст – изменение среднего </a:t>
             </a:r>
-            <a:endParaRPr lang="ru-RU" sz="1200" dirty="0"/>
           </a:p>
         </p:txBody>
       </p:sp>
@@ -5622,10 +5576,9 @@
           <a:lstStyle/>
           <a:p>
             <a:r>
-              <a:rPr lang="ru-RU" sz="1200" dirty="0" smtClean="0"/>
+              <a:rPr lang="ru-RU" sz="1200" dirty="0"/>
               <a:t>Кратковременный контекст – сезонность</a:t>
             </a:r>
-            <a:endParaRPr lang="ru-RU" sz="1200" dirty="0"/>
           </a:p>
         </p:txBody>
       </p:sp>
@@ -5691,13 +5644,6 @@
   <p:clrMapOvr>
     <a:masterClrMapping/>
   </p:clrMapOvr>
-  <p:timing>
-    <p:tnLst>
-      <p:par>
-        <p:cTn id="1" dur="indefinite" restart="never" nodeType="tmRoot"/>
-      </p:par>
-    </p:tnLst>
-  </p:timing>
 </p:sld>
 </file>
 
@@ -5740,11 +5686,11 @@
           <a:p>
             <a:pPr algn="ctr"/>
             <a:r>
-              <a:rPr lang="ru-RU" dirty="0" smtClean="0"/>
+              <a:rPr lang="ru-RU" dirty="0"/>
               <a:t>Долгосрочно-краткосрочная </a:t>
             </a:r>
             <a:r>
-              <a:rPr lang="en-US" dirty="0" smtClean="0"/>
+              <a:rPr lang="en-US" dirty="0"/>
               <a:t>RNN = LSTM</a:t>
             </a:r>
             <a:endParaRPr lang="ru-RU" dirty="0"/>
@@ -5785,26 +5731,22 @@
                   <a:buNone/>
                 </a:pPr>
                 <a:r>
-                  <a:rPr lang="ru-RU" sz="2200" dirty="0" smtClean="0"/>
+                  <a:rPr lang="ru-RU" sz="2200" dirty="0"/>
                   <a:t>Каждая ячейка памяти оснащена входами </a:t>
                 </a:r>
                 <a:r>
-                  <a:rPr lang="en-US" sz="2200" dirty="0" smtClean="0"/>
+                  <a:rPr lang="en-US" sz="2200" dirty="0"/>
                   <a:t>(gates)</a:t>
                 </a:r>
                 <a:r>
                   <a:rPr lang="ru-RU" sz="2200" dirty="0"/>
-                  <a:t> </a:t>
+                  <a:t> и внутренним состоянием </a:t>
                 </a:r>
                 <a:r>
-                  <a:rPr lang="ru-RU" sz="2200" dirty="0" smtClean="0"/>
-                  <a:t>и внутренним состоянием </a:t>
-                </a:r>
-                <a:r>
-                  <a:rPr lang="en-US" sz="2200" dirty="0" smtClean="0"/>
+                  <a:rPr lang="en-US" sz="2200" dirty="0"/>
                   <a:t>(node)</a:t>
                 </a:r>
-                <a:endParaRPr lang="ru-RU" sz="2200" dirty="0" smtClean="0"/>
+                <a:endParaRPr lang="ru-RU" sz="2200" dirty="0"/>
               </a:p>
               <a:p>
                 <a:pPr marL="0" lvl="0" indent="0">
@@ -6057,7 +5999,7 @@
                     </m:oMath>
                   </m:oMathPara>
                 </a14:m>
-                <a:endParaRPr lang="en-US" sz="2200" dirty="0" smtClean="0"/>
+                <a:endParaRPr lang="en-US" sz="2200" dirty="0"/>
               </a:p>
               <a:p>
                 <a:pPr marL="0" lvl="0" indent="0">
@@ -6307,7 +6249,7 @@
                     </m:oMath>
                   </m:oMathPara>
                 </a14:m>
-                <a:endParaRPr lang="en-US" sz="2200" dirty="0" smtClean="0"/>
+                <a:endParaRPr lang="en-US" sz="2200" dirty="0"/>
               </a:p>
               <a:p>
                 <a:pPr marL="0" indent="0">
@@ -6600,7 +6542,7 @@
                     </m:oMath>
                   </m:oMathPara>
                 </a14:m>
-                <a:endParaRPr lang="en-US" sz="2200" dirty="0" smtClean="0"/>
+                <a:endParaRPr lang="en-US" sz="2200" dirty="0"/>
               </a:p>
               <a:p>
                 <a:pPr marL="0" indent="0">
@@ -6613,7 +6555,7 @@
                   <a:buNone/>
                 </a:pPr>
                 <a:r>
-                  <a:rPr lang="ru-RU" sz="2200" dirty="0" smtClean="0"/>
+                  <a:rPr lang="ru-RU" sz="2200" dirty="0"/>
                   <a:t>Использование </a:t>
                 </a:r>
                 <a14:m>
@@ -6630,15 +6572,15 @@
                   </m:oMath>
                 </a14:m>
                 <a:r>
-                  <a:rPr lang="ru-RU" sz="2200" dirty="0" smtClean="0"/>
+                  <a:rPr lang="ru-RU" sz="2200" dirty="0"/>
                   <a:t> задает интервалы значений от 0 до 1</a:t>
                 </a:r>
                 <a:r>
-                  <a:rPr lang="en-US" sz="2200" dirty="0" smtClean="0"/>
+                  <a:rPr lang="en-US" sz="2200" dirty="0"/>
                   <a:t>, </a:t>
                 </a:r>
                 <a:r>
-                  <a:rPr lang="ru-RU" sz="2200" dirty="0" smtClean="0"/>
+                  <a:rPr lang="ru-RU" sz="2200" dirty="0"/>
                   <a:t>значение </a:t>
                 </a:r>
                 <a14:m>
@@ -6658,7 +6600,7 @@
                   </m:oMath>
                 </a14:m>
                 <a:r>
-                  <a:rPr lang="ru-RU" sz="2200" dirty="0" smtClean="0"/>
+                  <a:rPr lang="ru-RU" sz="2200" dirty="0"/>
                   <a:t> от -1 до 1. </a:t>
                 </a:r>
               </a:p>
@@ -6673,7 +6615,7 @@
                   <a:buNone/>
                 </a:pPr>
                 <a:r>
-                  <a:rPr lang="ru-RU" sz="2200" dirty="0" smtClean="0"/>
+                  <a:rPr lang="ru-RU" sz="2200" dirty="0"/>
                   <a:t>Долгосрочная память </a:t>
                 </a:r>
                 <a14:m>
@@ -6713,7 +6655,7 @@
                   </m:oMath>
                 </a14:m>
                 <a:r>
-                  <a:rPr lang="ru-RU" sz="2200" dirty="0" smtClean="0"/>
+                  <a:rPr lang="ru-RU" sz="2200" dirty="0"/>
                   <a:t> задается как</a:t>
                 </a:r>
               </a:p>
@@ -6947,7 +6889,7 @@
                     </m:oMath>
                   </m:oMathPara>
                 </a14:m>
-                <a:endParaRPr lang="en-US" sz="2200" dirty="0" smtClean="0"/>
+                <a:endParaRPr lang="en-US" sz="2200" dirty="0"/>
               </a:p>
               <a:p>
                 <a:pPr marL="0" indent="0">
@@ -6960,7 +6902,7 @@
                   <a:buNone/>
                 </a:pPr>
                 <a:r>
-                  <a:rPr lang="ru-RU" sz="2200" dirty="0" smtClean="0"/>
+                  <a:rPr lang="ru-RU" sz="2200" dirty="0"/>
                   <a:t>где </a:t>
                 </a:r>
                 <a14:m>
@@ -6975,7 +6917,7 @@
                   </m:oMath>
                 </a14:m>
                 <a:r>
-                  <a:rPr lang="ru-RU" sz="2200" dirty="0" smtClean="0"/>
+                  <a:rPr lang="ru-RU" sz="2200" dirty="0"/>
                   <a:t> - поэлементное произведение. </a:t>
                 </a:r>
               </a:p>
@@ -6989,7 +6931,7 @@
                   </a:spcBef>
                 </a:pPr>
                 <a:r>
-                  <a:rPr lang="ru-RU" sz="2000" dirty="0" smtClean="0"/>
+                  <a:rPr lang="ru-RU" sz="2000" dirty="0"/>
                   <a:t>Элемент забвения </a:t>
                 </a:r>
                 <a14:m>
@@ -7028,7 +6970,7 @@
                   </m:oMath>
                 </a14:m>
                 <a:r>
-                  <a:rPr lang="ru-RU" sz="2000" dirty="0" smtClean="0"/>
+                  <a:rPr lang="ru-RU" sz="2000" dirty="0"/>
                   <a:t> определяет то на сколько важно предыдущее состояние памяти </a:t>
                 </a:r>
                 <a14:m>
@@ -7070,7 +7012,7 @@
                     </m:r>
                   </m:oMath>
                 </a14:m>
-                <a:endParaRPr lang="ru-RU" sz="2000" dirty="0" smtClean="0"/>
+                <a:endParaRPr lang="ru-RU" sz="2000" dirty="0"/>
               </a:p>
               <a:p>
                 <a:pPr>
@@ -7082,7 +7024,7 @@
                   </a:spcBef>
                 </a:pPr>
                 <a:r>
-                  <a:rPr lang="ru-RU" sz="2000" dirty="0" smtClean="0"/>
+                  <a:rPr lang="ru-RU" sz="2000" dirty="0"/>
                   <a:t>Элемент входа </a:t>
                 </a:r>
                 <a14:m>
@@ -7125,16 +7067,8 @@
                   </m:oMath>
                 </a14:m>
                 <a:r>
-                  <a:rPr lang="ru-RU" sz="2000" dirty="0" smtClean="0"/>
-                  <a:t> </a:t>
-                </a:r>
-                <a:r>
                   <a:rPr lang="ru-RU" sz="2000" dirty="0"/>
-                  <a:t>определяет то на сколько </a:t>
-                </a:r>
-                <a:r>
-                  <a:rPr lang="ru-RU" sz="2000" dirty="0" smtClean="0"/>
-                  <a:t> важно текущее внутреннее состояние </a:t>
+                  <a:t> определяет то на сколько  важно текущее внутреннее состояние </a:t>
                 </a:r>
                 <a14:m>
                   <m:oMath xmlns:m="http://schemas.openxmlformats.org/officeDocument/2006/math">
@@ -7198,7 +7132,7 @@
                     </m:sSub>
                   </m:oMath>
                 </a14:m>
-                <a:endParaRPr lang="ru-RU" sz="2000" dirty="0" smtClean="0"/>
+                <a:endParaRPr lang="ru-RU" sz="2000" dirty="0"/>
               </a:p>
               <a:p>
                 <a:pPr>
@@ -7210,7 +7144,7 @@
                   </a:spcBef>
                 </a:pPr>
                 <a:r>
-                  <a:rPr lang="ru-RU" sz="2000" dirty="0" smtClean="0"/>
+                  <a:rPr lang="ru-RU" sz="2000" dirty="0"/>
                   <a:t>Элемент </a:t>
                 </a:r>
                 <a14:m>
@@ -7318,7 +7252,7 @@
                   </m:oMath>
                 </a14:m>
                 <a:r>
-                  <a:rPr lang="ru-RU" sz="2000" dirty="0" smtClean="0"/>
+                  <a:rPr lang="ru-RU" sz="2000" dirty="0"/>
                   <a:t> - добавка к памяти.</a:t>
                 </a:r>
                 <a:endParaRPr lang="en-US" sz="2000" dirty="0"/>
@@ -7333,7 +7267,7 @@
                   </a:spcBef>
                   <a:buNone/>
                 </a:pPr>
-                <a:endParaRPr lang="en-US" sz="2400" dirty="0" smtClean="0"/>
+                <a:endParaRPr lang="en-US" sz="2400" dirty="0"/>
               </a:p>
             </p:txBody>
           </p:sp>
@@ -7432,13 +7366,6 @@
   <p:clrMapOvr>
     <a:masterClrMapping/>
   </p:clrMapOvr>
-  <p:timing>
-    <p:tnLst>
-      <p:par>
-        <p:cTn id="1" dur="indefinite" restart="never" nodeType="tmRoot"/>
-      </p:par>
-    </p:tnLst>
-  </p:timing>
 </p:sld>
 </file>
 
@@ -7481,11 +7408,11 @@
           <a:p>
             <a:pPr algn="ctr"/>
             <a:r>
-              <a:rPr lang="ru-RU" dirty="0" smtClean="0"/>
+              <a:rPr lang="ru-RU" dirty="0"/>
               <a:t>Долгосрочно-краткосрочная </a:t>
             </a:r>
             <a:r>
-              <a:rPr lang="en-US" dirty="0" smtClean="0"/>
+              <a:rPr lang="en-US" dirty="0"/>
               <a:t>RNN = LSTM</a:t>
             </a:r>
             <a:endParaRPr lang="ru-RU" dirty="0"/>
@@ -7526,7 +7453,7 @@
                   <a:buNone/>
                 </a:pPr>
                 <a:r>
-                  <a:rPr lang="ru-RU" sz="2200" dirty="0" smtClean="0"/>
+                  <a:rPr lang="ru-RU" sz="2200" dirty="0"/>
                   <a:t>Выход системы – ее внутреннее состояние. Определяете выходным элементом</a:t>
                 </a:r>
               </a:p>
@@ -7778,7 +7705,7 @@
                     </m:oMath>
                   </m:oMathPara>
                 </a14:m>
-                <a:endParaRPr lang="ru-RU" sz="2200" dirty="0" smtClean="0"/>
+                <a:endParaRPr lang="ru-RU" sz="2200" dirty="0"/>
               </a:p>
               <a:p>
                 <a:pPr marL="0" indent="0">
@@ -7942,7 +7869,7 @@
                     </m:oMath>
                   </m:oMathPara>
                 </a14:m>
-                <a:endParaRPr lang="ru-RU" sz="2200" dirty="0" smtClean="0"/>
+                <a:endParaRPr lang="ru-RU" sz="2200" dirty="0"/>
               </a:p>
               <a:p>
                 <a:pPr marL="0" lvl="0" indent="0">
@@ -7955,7 +7882,7 @@
                   <a:buNone/>
                 </a:pPr>
                 <a:r>
-                  <a:rPr lang="ru-RU" sz="2400" dirty="0" smtClean="0"/>
+                  <a:rPr lang="ru-RU" sz="2400" dirty="0"/>
                   <a:t>Если </a:t>
                 </a:r>
                 <a14:m>
@@ -8006,7 +7933,7 @@
                   </m:oMath>
                 </a14:m>
                 <a:r>
-                  <a:rPr lang="ru-RU" sz="2400" dirty="0" smtClean="0"/>
+                  <a:rPr lang="ru-RU" sz="2400" dirty="0"/>
                   <a:t> близко к 1 – скрытое состояние задается полностью долгосрочной памятью – важен тренд</a:t>
                 </a:r>
               </a:p>
@@ -8021,7 +7948,7 @@
                   <a:buNone/>
                 </a:pPr>
                 <a:r>
-                  <a:rPr lang="ru-RU" sz="2400" dirty="0" smtClean="0"/>
+                  <a:rPr lang="ru-RU" sz="2400" dirty="0"/>
                   <a:t>Если </a:t>
                 </a:r>
                 <a14:m>
@@ -8073,13 +8000,9 @@
                 </a14:m>
                 <a:r>
                   <a:rPr lang="ru-RU" sz="2400" dirty="0"/>
-                  <a:t> близко к </a:t>
+                  <a:t> близко к 0 – скрытое состояние игнорируется – важны текущие колебания.</a:t>
                 </a:r>
-                <a:r>
-                  <a:rPr lang="ru-RU" sz="2400" dirty="0" smtClean="0"/>
-                  <a:t>0 – скрытое состояние игнорируется – важны текущие колебания.</a:t>
-                </a:r>
-                <a:endParaRPr lang="en-US" sz="2400" dirty="0" smtClean="0"/>
+                <a:endParaRPr lang="en-US" sz="2400" dirty="0"/>
               </a:p>
             </p:txBody>
           </p:sp>
@@ -8179,13 +8102,6 @@
   <p:clrMapOvr>
     <a:masterClrMapping/>
   </p:clrMapOvr>
-  <p:timing>
-    <p:tnLst>
-      <p:par>
-        <p:cTn id="1" dur="indefinite" restart="never" nodeType="tmRoot"/>
-      </p:par>
-    </p:tnLst>
-  </p:timing>
 </p:sld>
 </file>
 
@@ -8230,11 +8146,11 @@
           <a:p>
             <a:pPr algn="ctr"/>
             <a:r>
-              <a:rPr lang="ru-RU" dirty="0" smtClean="0"/>
+              <a:rPr lang="ru-RU" dirty="0"/>
               <a:t>Долгосрочно-краткосрочная </a:t>
             </a:r>
             <a:r>
-              <a:rPr lang="en-US" dirty="0" smtClean="0"/>
+              <a:rPr lang="en-US" dirty="0"/>
               <a:t>RNN = LSTM</a:t>
             </a:r>
             <a:endParaRPr lang="ru-RU" dirty="0"/>
@@ -8267,37 +8183,37 @@
               <a:buNone/>
             </a:pPr>
             <a:r>
-              <a:rPr lang="en-US" sz="2400" dirty="0" smtClean="0"/>
+              <a:rPr lang="en-US" sz="2400" dirty="0"/>
               <a:t>LSTM </a:t>
             </a:r>
             <a:r>
-              <a:rPr lang="ru-RU" sz="2400" dirty="0" smtClean="0"/>
+              <a:rPr lang="ru-RU" sz="2400" dirty="0"/>
               <a:t>отвечает на вопросы</a:t>
             </a:r>
           </a:p>
           <a:p>
             <a:r>
-              <a:rPr lang="ru-RU" sz="2400" dirty="0" smtClean="0"/>
+              <a:rPr lang="ru-RU" sz="2400" dirty="0"/>
               <a:t>Компактное представление временного ряда (контекст), </a:t>
             </a:r>
-            <a:endParaRPr lang="en-US" sz="2400" dirty="0" smtClean="0"/>
-          </a:p>
-          <a:p>
-            <a:r>
-              <a:rPr lang="ru-RU" sz="2400" dirty="0" smtClean="0"/>
+            <a:endParaRPr lang="en-US" sz="2400" dirty="0"/>
+          </a:p>
+          <a:p>
+            <a:r>
+              <a:rPr lang="ru-RU" sz="2400" dirty="0"/>
               <a:t>как объединить новые входные данные с прошлым представлением ряда</a:t>
             </a:r>
-            <a:endParaRPr lang="en-US" sz="2400" dirty="0" smtClean="0"/>
-          </a:p>
-          <a:p>
-            <a:r>
-              <a:rPr lang="ru-RU" sz="2400" dirty="0" smtClean="0"/>
+            <a:endParaRPr lang="en-US" sz="2400" dirty="0"/>
+          </a:p>
+          <a:p>
+            <a:r>
+              <a:rPr lang="ru-RU" sz="2400" dirty="0"/>
               <a:t>Что уже нужно забыть о ВР  </a:t>
             </a:r>
           </a:p>
           <a:p>
             <a:r>
-              <a:rPr lang="ru-RU" sz="2400" dirty="0" smtClean="0"/>
+              <a:rPr lang="ru-RU" sz="2400" dirty="0"/>
               <a:t>Что выводить в качестве прогноза для следующего временного шага.</a:t>
             </a:r>
           </a:p>
@@ -8306,11 +8222,11 @@
               <a:buNone/>
             </a:pPr>
             <a:r>
-              <a:rPr lang="en-US" sz="2400" dirty="0" smtClean="0"/>
+              <a:rPr lang="en-US" sz="2400" dirty="0"/>
               <a:t>LSTM </a:t>
             </a:r>
             <a:r>
-              <a:rPr lang="ru-RU" sz="2400" dirty="0" smtClean="0"/>
+              <a:rPr lang="ru-RU" sz="2400" dirty="0"/>
               <a:t>позволяет строить среднесрочные прогнозы с достаточным контекстом. </a:t>
             </a:r>
           </a:p>
@@ -8319,27 +8235,27 @@
               <a:buNone/>
             </a:pPr>
             <a:r>
-              <a:rPr lang="en-US" sz="2400" dirty="0" smtClean="0"/>
+              <a:rPr lang="en-US" sz="2400" dirty="0"/>
               <a:t>LSTM</a:t>
             </a:r>
             <a:r>
-              <a:rPr lang="ru-RU" sz="2400" dirty="0" smtClean="0"/>
+              <a:rPr lang="ru-RU" sz="2400" dirty="0"/>
               <a:t> это </a:t>
             </a:r>
             <a:r>
-              <a:rPr lang="ru-RU" sz="2400" dirty="0" err="1" smtClean="0"/>
+              <a:rPr lang="ru-RU" sz="2400" dirty="0" err="1"/>
               <a:t>бейзлайн</a:t>
             </a:r>
             <a:r>
-              <a:rPr lang="ru-RU" sz="2400" dirty="0" smtClean="0"/>
+              <a:rPr lang="ru-RU" sz="2400" dirty="0"/>
               <a:t> </a:t>
             </a:r>
             <a:r>
-              <a:rPr lang="en-US" sz="2400" dirty="0" smtClean="0"/>
+              <a:rPr lang="en-US" sz="2400" dirty="0"/>
               <a:t>DL </a:t>
             </a:r>
             <a:r>
-              <a:rPr lang="ru-RU" sz="2400" dirty="0" smtClean="0"/>
+              <a:rPr lang="ru-RU" sz="2400" dirty="0"/>
               <a:t>моделей предсказания ВР</a:t>
             </a:r>
           </a:p>
@@ -8506,18 +8422,11 @@
   <p:clrMapOvr>
     <a:masterClrMapping/>
   </p:clrMapOvr>
-  <p:timing>
-    <p:tnLst>
-      <p:par>
-        <p:cTn id="1" dur="indefinite" restart="never" nodeType="tmRoot"/>
-      </p:par>
-    </p:tnLst>
-  </p:timing>
 </p:sld>
 </file>
 
 <file path=ppt/slides/slide17.xml><?xml version="1.0" encoding="utf-8"?>
-<p:sld xmlns:a="http://schemas.openxmlformats.org/drawingml/2006/main" xmlns:r="http://schemas.openxmlformats.org/officeDocument/2006/relationships" xmlns:p="http://schemas.openxmlformats.org/presentationml/2006/main">
+<p:sld xmlns:a="http://schemas.openxmlformats.org/drawingml/2006/main" xmlns:r="http://schemas.openxmlformats.org/officeDocument/2006/relationships" xmlns:p="http://schemas.openxmlformats.org/presentationml/2006/main" show="0">
   <p:cSld>
     <p:spTree>
       <p:nvGrpSpPr>
@@ -8558,11 +8467,7 @@
             <a:pPr algn="ctr"/>
             <a:r>
               <a:rPr lang="en-US" dirty="0"/>
-              <a:t>Gated Recurrent </a:t>
-            </a:r>
-            <a:r>
-              <a:rPr lang="en-US" dirty="0" smtClean="0"/>
-              <a:t>Units (GRU)</a:t>
+              <a:t>Gated Recurrent Units (GRU)</a:t>
             </a:r>
             <a:endParaRPr lang="ru-RU" dirty="0"/>
           </a:p>
@@ -8594,36 +8499,36 @@
                   <a:buNone/>
                 </a:pPr>
                 <a:r>
-                  <a:rPr lang="ru-RU" sz="2200" b="1" dirty="0" smtClean="0"/>
+                  <a:rPr lang="ru-RU" sz="2200" b="1" dirty="0"/>
                   <a:t>Гипотеза</a:t>
                 </a:r>
                 <a:r>
-                  <a:rPr lang="ru-RU" sz="2200" dirty="0" smtClean="0"/>
+                  <a:rPr lang="ru-RU" sz="2200" dirty="0"/>
                   <a:t>: число </a:t>
                 </a:r>
                 <a:r>
-                  <a:rPr lang="ru-RU" sz="2200" dirty="0" err="1" smtClean="0"/>
+                  <a:rPr lang="ru-RU" sz="2200" dirty="0" err="1"/>
                   <a:t>гейтов</a:t>
                 </a:r>
                 <a:r>
-                  <a:rPr lang="ru-RU" sz="2200" dirty="0" smtClean="0"/>
+                  <a:rPr lang="ru-RU" sz="2200" dirty="0"/>
                   <a:t> в </a:t>
                 </a:r>
                 <a:r>
-                  <a:rPr lang="en-US" sz="2200" dirty="0" smtClean="0"/>
+                  <a:rPr lang="en-US" sz="2200" dirty="0"/>
                   <a:t>LSTM</a:t>
                 </a:r>
                 <a:r>
-                  <a:rPr lang="ru-RU" sz="2200" dirty="0" smtClean="0"/>
+                  <a:rPr lang="ru-RU" sz="2200" dirty="0"/>
                   <a:t> избыточно. Память можно задавать исключительно элементами ее </a:t>
                 </a:r>
               </a:p>
               <a:p>
                 <a:r>
-                  <a:rPr lang="ru-RU" sz="2200" dirty="0" smtClean="0"/>
+                  <a:rPr lang="ru-RU" sz="2200" dirty="0"/>
                   <a:t>обновления (как сильно текущее состояние влияет на контекст – долгосрочная память)</a:t>
                 </a:r>
-                <a:endParaRPr lang="en-US" sz="2200" dirty="0" smtClean="0"/>
+                <a:endParaRPr lang="en-US" sz="2200" dirty="0"/>
               </a:p>
               <a:p>
                 <a:pPr marL="0" lvl="0" indent="0">
@@ -8898,10 +8803,9 @@
               </a:p>
               <a:p>
                 <a:r>
-                  <a:rPr lang="ru-RU" sz="2200" dirty="0" smtClean="0"/>
+                  <a:rPr lang="ru-RU" sz="2200" dirty="0"/>
                   <a:t>Забвения (на сколько устарел контекст – краткосрочная память)</a:t>
                 </a:r>
-                <a:endParaRPr lang="ru-RU" sz="2200" dirty="0"/>
               </a:p>
               <a:p>
                 <a:pPr marL="0" lvl="0" indent="0">
@@ -9185,11 +9089,11 @@
                   <a:buNone/>
                 </a:pPr>
                 <a:r>
-                  <a:rPr lang="ru-RU" sz="2200" dirty="0" smtClean="0"/>
+                  <a:rPr lang="ru-RU" sz="2200" dirty="0"/>
                   <a:t>Интеграция этих функций задет внутреннее состояние</a:t>
                 </a:r>
                 <a:r>
-                  <a:rPr lang="en-US" sz="2200" dirty="0" smtClean="0"/>
+                  <a:rPr lang="en-US" sz="2200" dirty="0"/>
                   <a:t> </a:t>
                 </a:r>
                 <a14:m>
@@ -9214,7 +9118,7 @@
                     </m:acc>
                   </m:oMath>
                 </a14:m>
-                <a:endParaRPr lang="ru-RU" sz="2200" dirty="0" smtClean="0"/>
+                <a:endParaRPr lang="ru-RU" sz="2200" dirty="0"/>
               </a:p>
               <a:p>
                 <a:pPr marL="0" indent="0">
@@ -9466,14 +9370,14 @@
                     </m:oMath>
                   </m:oMathPara>
                 </a14:m>
-                <a:endParaRPr lang="en-US" sz="2200" dirty="0" smtClean="0"/>
+                <a:endParaRPr lang="en-US" sz="2200" dirty="0"/>
               </a:p>
               <a:p>
                 <a:pPr marL="0" indent="0">
                   <a:buNone/>
                 </a:pPr>
                 <a:r>
-                  <a:rPr lang="ru-RU" sz="2200" dirty="0" smtClean="0"/>
+                  <a:rPr lang="ru-RU" sz="2200" dirty="0"/>
                   <a:t>если </a:t>
                 </a:r>
                 <a14:m>
@@ -9524,19 +9428,19 @@
                   </m:oMath>
                 </a14:m>
                 <a:r>
-                  <a:rPr lang="ru-RU" sz="2200" dirty="0" smtClean="0"/>
+                  <a:rPr lang="ru-RU" sz="2200" dirty="0"/>
                   <a:t>=1 получается </a:t>
                 </a:r>
                 <a:r>
-                  <a:rPr lang="en-US" sz="2200" dirty="0" smtClean="0"/>
+                  <a:rPr lang="en-US" sz="2200" dirty="0"/>
                   <a:t>RNN </a:t>
                 </a:r>
                 <a:r>
-                  <a:rPr lang="ru-RU" sz="2200" dirty="0" smtClean="0"/>
+                  <a:rPr lang="ru-RU" sz="2200" dirty="0"/>
                   <a:t>(полный учет контекста)</a:t>
                 </a:r>
                 <a:r>
-                  <a:rPr lang="en-US" sz="2200" dirty="0" smtClean="0"/>
+                  <a:rPr lang="en-US" sz="2200" dirty="0"/>
                   <a:t>, </a:t>
                 </a:r>
               </a:p>
@@ -9545,7 +9449,7 @@
                   <a:buNone/>
                 </a:pPr>
                 <a:r>
-                  <a:rPr lang="ru-RU" sz="2200" dirty="0" smtClean="0"/>
+                  <a:rPr lang="ru-RU" sz="2200" dirty="0"/>
                   <a:t>если </a:t>
                 </a:r>
                 <a14:m>
@@ -9596,15 +9500,15 @@
                   </m:oMath>
                 </a14:m>
                 <a:r>
-                  <a:rPr lang="ru-RU" sz="2200" dirty="0" smtClean="0"/>
+                  <a:rPr lang="ru-RU" sz="2200" dirty="0"/>
                   <a:t>=0 </a:t>
                 </a:r>
                 <a:r>
-                  <a:rPr lang="en-US" sz="2200" dirty="0" smtClean="0"/>
+                  <a:rPr lang="en-US" sz="2200" dirty="0"/>
                   <a:t>MLP (reset)</a:t>
                 </a:r>
                 <a:r>
-                  <a:rPr lang="ru-RU" sz="2200" dirty="0" smtClean="0"/>
+                  <a:rPr lang="ru-RU" sz="2200" dirty="0"/>
                   <a:t> </a:t>
                 </a:r>
               </a:p>
@@ -9613,7 +9517,7 @@
                   <a:buNone/>
                 </a:pPr>
                 <a:r>
-                  <a:rPr lang="ru-RU" sz="2200" dirty="0" smtClean="0"/>
+                  <a:rPr lang="ru-RU" sz="2200" dirty="0"/>
                   <a:t>состояние  памяти </a:t>
                 </a:r>
                 <a14:m>
@@ -9652,7 +9556,7 @@
                   </m:oMath>
                 </a14:m>
                 <a:r>
-                  <a:rPr lang="ru-RU" sz="2200" dirty="0" smtClean="0"/>
+                  <a:rPr lang="ru-RU" sz="2200" dirty="0"/>
                   <a:t>– скользящее среднее </a:t>
                 </a:r>
                 <a14:m>
@@ -9685,7 +9589,7 @@
                   </m:oMath>
                 </a14:m>
                 <a:r>
-                  <a:rPr lang="ru-RU" sz="2200" dirty="0" smtClean="0"/>
+                  <a:rPr lang="ru-RU" sz="2200" dirty="0"/>
                   <a:t> и текущего </a:t>
                 </a:r>
                 <a14:m>
@@ -9735,7 +9639,7 @@
                     </m:sSub>
                   </m:oMath>
                 </a14:m>
-                <a:endParaRPr lang="ru-RU" sz="2200" dirty="0" smtClean="0"/>
+                <a:endParaRPr lang="ru-RU" sz="2200" dirty="0"/>
               </a:p>
               <a:p>
                 <a:pPr marL="0" indent="0">
@@ -9960,14 +9864,14 @@
                     </m:oMath>
                   </m:oMathPara>
                 </a14:m>
-                <a:endParaRPr lang="en-US" sz="2200" dirty="0" smtClean="0"/>
+                <a:endParaRPr lang="en-US" sz="2200" dirty="0"/>
               </a:p>
               <a:p>
                 <a:pPr marL="0" indent="0">
                   <a:buNone/>
                 </a:pPr>
                 <a:r>
-                  <a:rPr lang="ru-RU" dirty="0" smtClean="0"/>
+                  <a:rPr lang="ru-RU" dirty="0"/>
                   <a:t>Такая ячейка - </a:t>
                 </a:r>
                 <a:r>
@@ -10078,18 +9982,11 @@
   <p:clrMapOvr>
     <a:masterClrMapping/>
   </p:clrMapOvr>
-  <p:timing>
-    <p:tnLst>
-      <p:par>
-        <p:cTn id="1" dur="indefinite" restart="never" nodeType="tmRoot"/>
-      </p:par>
-    </p:tnLst>
-  </p:timing>
 </p:sld>
 </file>
 
 <file path=ppt/slides/slide18.xml><?xml version="1.0" encoding="utf-8"?>
-<p:sld xmlns:a="http://schemas.openxmlformats.org/drawingml/2006/main" xmlns:r="http://schemas.openxmlformats.org/officeDocument/2006/relationships" xmlns:p="http://schemas.openxmlformats.org/presentationml/2006/main">
+<p:sld xmlns:a="http://schemas.openxmlformats.org/drawingml/2006/main" xmlns:r="http://schemas.openxmlformats.org/officeDocument/2006/relationships" xmlns:p="http://schemas.openxmlformats.org/presentationml/2006/main" show="0">
   <p:cSld>
     <p:spTree>
       <p:nvGrpSpPr>
@@ -10145,19 +10042,19 @@
           <a:lstStyle/>
           <a:p>
             <a:r>
-              <a:rPr lang="ru-RU" dirty="0" smtClean="0"/>
+              <a:rPr lang="ru-RU" dirty="0"/>
               <a:t>Несмотря на теоретическую обоснованность </a:t>
             </a:r>
             <a:r>
-              <a:rPr lang="en-US" dirty="0" smtClean="0"/>
+              <a:rPr lang="en-US" dirty="0"/>
               <a:t>GRU </a:t>
             </a:r>
             <a:r>
-              <a:rPr lang="ru-RU" dirty="0" smtClean="0"/>
+              <a:rPr lang="ru-RU" dirty="0"/>
               <a:t>как правило менее точные чем </a:t>
             </a:r>
             <a:r>
-              <a:rPr lang="en-US" dirty="0" smtClean="0"/>
+              <a:rPr lang="en-US" dirty="0"/>
               <a:t>LSTM</a:t>
             </a:r>
             <a:endParaRPr lang="ru-RU" dirty="0"/>
@@ -10267,13 +10164,6 @@
   <p:clrMapOvr>
     <a:masterClrMapping/>
   </p:clrMapOvr>
-  <p:timing>
-    <p:tnLst>
-      <p:par>
-        <p:cTn id="1" dur="indefinite" restart="never" nodeType="tmRoot"/>
-      </p:par>
-    </p:tnLst>
-  </p:timing>
 </p:sld>
 </file>
 
@@ -10316,7 +10206,7 @@
           <a:p>
             <a:pPr algn="ctr"/>
             <a:r>
-              <a:rPr lang="en-US" dirty="0" smtClean="0"/>
+              <a:rPr lang="en-US" dirty="0"/>
               <a:t>ESRNN</a:t>
             </a:r>
             <a:endParaRPr lang="ru-RU" dirty="0"/>
@@ -10349,68 +10239,68 @@
               <a:buNone/>
             </a:pPr>
             <a:r>
-              <a:rPr lang="ru-RU" sz="2400" b="1" dirty="0" smtClean="0"/>
+              <a:rPr lang="ru-RU" sz="2400" b="1" dirty="0"/>
               <a:t>Гибридная модель</a:t>
             </a:r>
           </a:p>
           <a:p>
             <a:r>
-              <a:rPr lang="ru-RU" sz="2400" dirty="0" smtClean="0"/>
+              <a:rPr lang="ru-RU" sz="2400" dirty="0"/>
               <a:t>Часто часть ВР можно описать классически.</a:t>
             </a:r>
           </a:p>
           <a:p>
             <a:r>
-              <a:rPr lang="ru-RU" sz="2400" b="1" dirty="0" smtClean="0"/>
+              <a:rPr lang="ru-RU" sz="2400" b="1" dirty="0"/>
               <a:t>Гипотеза</a:t>
             </a:r>
             <a:r>
-              <a:rPr lang="ru-RU" sz="2400" dirty="0" smtClean="0"/>
+              <a:rPr lang="ru-RU" sz="2400" dirty="0"/>
               <a:t>: остаток ВР можно описать </a:t>
             </a:r>
             <a:r>
-              <a:rPr lang="en-US" sz="2400" dirty="0" smtClean="0"/>
+              <a:rPr lang="en-US" sz="2400" dirty="0"/>
               <a:t>RNN</a:t>
             </a:r>
           </a:p>
           <a:p>
             <a:r>
-              <a:rPr lang="ru-RU" sz="2400" dirty="0" smtClean="0"/>
+              <a:rPr lang="ru-RU" sz="2400" dirty="0"/>
               <a:t>Модель </a:t>
             </a:r>
             <a:r>
-              <a:rPr lang="en-US" sz="2400" dirty="0" smtClean="0"/>
+              <a:rPr lang="en-US" sz="2400" dirty="0"/>
               <a:t>ES RNN </a:t>
             </a:r>
             <a:r>
-              <a:rPr lang="ru-RU" sz="2400" dirty="0" smtClean="0"/>
+              <a:rPr lang="ru-RU" sz="2400" dirty="0"/>
               <a:t> описывает уровень и сезонность при помощи </a:t>
             </a:r>
             <a:r>
-              <a:rPr lang="en-US" sz="2400" dirty="0" smtClean="0"/>
+              <a:rPr lang="en-US" sz="2400" dirty="0"/>
               <a:t>ETS (HW).</a:t>
             </a:r>
           </a:p>
           <a:p>
             <a:r>
-              <a:rPr lang="ru-RU" sz="2400" dirty="0" smtClean="0"/>
+              <a:rPr lang="ru-RU" sz="2400" dirty="0"/>
               <a:t>Мультипликативный остаток описывается </a:t>
             </a:r>
             <a:r>
-              <a:rPr lang="en-US" sz="2400" dirty="0" smtClean="0"/>
+              <a:rPr lang="en-US" sz="2400" dirty="0"/>
               <a:t>LSTM.</a:t>
             </a:r>
           </a:p>
           <a:p>
             <a:pPr lvl="1"/>
             <a:r>
-              <a:rPr lang="en-US" sz="2000" dirty="0" smtClean="0"/>
+              <a:rPr lang="en-US" sz="2000" dirty="0"/>
               <a:t>LSTM temporal</a:t>
             </a:r>
           </a:p>
           <a:p>
             <a:r>
-              <a:rPr lang="ru-RU" sz="2400" dirty="0" smtClean="0"/>
+              <a:rPr lang="ru-RU" sz="2400" dirty="0"/>
               <a:t>Подбор параметров обоих алгоритмов проводится совместно.</a:t>
             </a:r>
           </a:p>
@@ -10432,23 +10322,7 @@
             </a:r>
             <a:r>
               <a:rPr lang="ru-RU" dirty="0"/>
-              <a:t> </a:t>
-            </a:r>
-            <a:r>
-              <a:rPr lang="ru-RU" dirty="0" smtClean="0"/>
-              <a:t> </a:t>
-            </a:r>
-            <a:r>
-              <a:rPr lang="ru-RU" dirty="0"/>
-              <a:t>в </a:t>
-            </a:r>
-            <a:r>
-              <a:rPr lang="ru-RU" dirty="0" smtClean="0"/>
-              <a:t>классическом </a:t>
-            </a:r>
-            <a:r>
-              <a:rPr lang="ru-RU" dirty="0"/>
-              <a:t>ETS.</a:t>
+              <a:t>  в классическом ETS.</a:t>
             </a:r>
           </a:p>
           <a:p>
@@ -10483,44 +10357,27 @@
             </a:r>
             <a:r>
               <a:rPr lang="ru-RU" dirty="0"/>
-              <a:t>) и их тип </a:t>
-            </a:r>
-            <a:r>
-              <a:rPr lang="ru-RU" dirty="0" smtClean="0"/>
-              <a:t>важны </a:t>
+              <a:t>) и их тип важны для ряда.</a:t>
+            </a:r>
+          </a:p>
+          <a:p>
+            <a:pPr lvl="1"/>
+            <a:r>
+              <a:rPr lang="ru-RU" b="1" dirty="0" err="1"/>
+              <a:t>Неизбыточность</a:t>
             </a:r>
             <a:r>
               <a:rPr lang="ru-RU" dirty="0"/>
-              <a:t>для ряда</a:t>
-            </a:r>
-            <a:r>
-              <a:rPr lang="ru-RU" dirty="0" smtClean="0"/>
-              <a:t>.</a:t>
-            </a:r>
-          </a:p>
-          <a:p>
-            <a:pPr lvl="1"/>
-            <a:r>
-              <a:rPr lang="ru-RU" b="1" dirty="0" err="1"/>
-              <a:t>Н</a:t>
-            </a:r>
-            <a:r>
-              <a:rPr lang="ru-RU" b="1" dirty="0" err="1" smtClean="0"/>
-              <a:t>еизбыточность</a:t>
-            </a:r>
-            <a:r>
-              <a:rPr lang="ru-RU" dirty="0" smtClean="0"/>
               <a:t> - </a:t>
             </a:r>
             <a:r>
-              <a:rPr lang="en-US" dirty="0" smtClean="0"/>
+              <a:rPr lang="en-US" dirty="0"/>
               <a:t>RNN </a:t>
             </a:r>
             <a:r>
-              <a:rPr lang="ru-RU" dirty="0" smtClean="0"/>
+              <a:rPr lang="ru-RU" dirty="0"/>
               <a:t>только там, где она нужна.</a:t>
             </a:r>
-            <a:endParaRPr lang="ru-RU" dirty="0"/>
           </a:p>
         </p:txBody>
       </p:sp>
@@ -10790,18 +10647,17 @@
           <a:p>
             <a:pPr algn="ctr"/>
             <a:r>
-              <a:rPr lang="ru-RU" b="1" dirty="0" smtClean="0"/>
+              <a:rPr lang="ru-RU" b="1" dirty="0"/>
               <a:t>Проблемы </a:t>
             </a:r>
             <a:r>
-              <a:rPr lang="en-US" b="1" dirty="0" smtClean="0"/>
+              <a:rPr lang="en-US" b="1" dirty="0"/>
               <a:t>AR – Net </a:t>
             </a:r>
             <a:r>
-              <a:rPr lang="ru-RU" b="1" dirty="0" smtClean="0"/>
+              <a:rPr lang="ru-RU" b="1" dirty="0"/>
               <a:t>подхода</a:t>
             </a:r>
-            <a:endParaRPr lang="ru-RU" b="1" dirty="0"/>
           </a:p>
         </p:txBody>
       </p:sp>
@@ -10837,7 +10693,7 @@
               <a:buNone/>
             </a:pPr>
             <a:r>
-              <a:rPr lang="ru-RU" sz="2000" b="1" dirty="0" smtClean="0"/>
+              <a:rPr lang="ru-RU" sz="2000" b="1" dirty="0"/>
               <a:t>Преимущества</a:t>
             </a:r>
           </a:p>
@@ -10851,11 +10707,11 @@
               </a:spcBef>
             </a:pPr>
             <a:r>
-              <a:rPr lang="ru-RU" sz="2000" dirty="0" smtClean="0"/>
+              <a:rPr lang="ru-RU" sz="2000" dirty="0"/>
               <a:t>Можно использовать </a:t>
             </a:r>
             <a:r>
-              <a:rPr lang="ru-RU" sz="2000" b="1" dirty="0" smtClean="0"/>
+              <a:rPr lang="ru-RU" sz="2000" b="1" dirty="0"/>
               <a:t>несколько ВР</a:t>
             </a:r>
           </a:p>
@@ -10869,15 +10725,15 @@
               </a:spcBef>
             </a:pPr>
             <a:r>
-              <a:rPr lang="ru-RU" sz="2000" dirty="0" smtClean="0"/>
+              <a:rPr lang="ru-RU" sz="2000" dirty="0"/>
               <a:t>Работает </a:t>
             </a:r>
             <a:r>
-              <a:rPr lang="ru-RU" sz="2000" b="1" dirty="0" smtClean="0"/>
+              <a:rPr lang="ru-RU" sz="2000" b="1" dirty="0"/>
               <a:t>для сложных паттернов</a:t>
             </a:r>
             <a:r>
-              <a:rPr lang="ru-RU" sz="2000" dirty="0" smtClean="0"/>
+              <a:rPr lang="ru-RU" sz="2000" dirty="0"/>
               <a:t>, несводимых к стационарным ВР</a:t>
             </a:r>
           </a:p>
@@ -10891,18 +10747,18 @@
               </a:spcBef>
             </a:pPr>
             <a:r>
-              <a:rPr lang="ru-RU" sz="2000" dirty="0" smtClean="0"/>
+              <a:rPr lang="ru-RU" sz="2000" dirty="0"/>
               <a:t>Свобода выбора функции потерь – </a:t>
             </a:r>
             <a:r>
-              <a:rPr lang="ru-RU" sz="2000" b="1" dirty="0" smtClean="0"/>
+              <a:rPr lang="ru-RU" sz="2000" b="1" dirty="0"/>
               <a:t>возможность регуляризации</a:t>
             </a:r>
             <a:r>
-              <a:rPr lang="ru-RU" sz="2000" dirty="0" smtClean="0"/>
+              <a:rPr lang="ru-RU" sz="2000" dirty="0"/>
               <a:t>.</a:t>
             </a:r>
-            <a:endParaRPr lang="en-US" sz="2000" dirty="0" smtClean="0"/>
+            <a:endParaRPr lang="en-US" sz="2000" dirty="0"/>
           </a:p>
           <a:p>
             <a:pPr marL="0" indent="0">
@@ -10915,14 +10771,14 @@
               <a:buNone/>
             </a:pPr>
             <a:r>
-              <a:rPr lang="ru-RU" sz="2000" b="1" dirty="0" smtClean="0"/>
+              <a:rPr lang="ru-RU" sz="2000" b="1" dirty="0"/>
               <a:t>Недостатки </a:t>
             </a:r>
             <a:r>
-              <a:rPr lang="en-US" sz="2000" b="1" dirty="0" smtClean="0"/>
+              <a:rPr lang="en-US" sz="2000" b="1" dirty="0"/>
               <a:t>AR-Net, NAR</a:t>
             </a:r>
-            <a:endParaRPr lang="ru-RU" sz="2000" b="1" dirty="0" smtClean="0"/>
+            <a:endParaRPr lang="ru-RU" sz="2000" b="1" dirty="0"/>
           </a:p>
           <a:p>
             <a:pPr marL="444500">
@@ -10934,23 +10790,23 @@
               </a:spcBef>
             </a:pPr>
             <a:r>
-              <a:rPr lang="ru-RU" sz="2000" dirty="0" err="1" smtClean="0"/>
+              <a:rPr lang="ru-RU" sz="2000" dirty="0" err="1"/>
               <a:t>Полносвязная</a:t>
             </a:r>
             <a:r>
-              <a:rPr lang="ru-RU" sz="2000" dirty="0" smtClean="0"/>
+              <a:rPr lang="ru-RU" sz="2000" dirty="0"/>
               <a:t> структура на длинном окне (несколько периодов, паттернов и </a:t>
             </a:r>
             <a:r>
-              <a:rPr lang="ru-RU" sz="2000" dirty="0" err="1" smtClean="0"/>
+              <a:rPr lang="ru-RU" sz="2000" dirty="0" err="1"/>
               <a:t>тд</a:t>
             </a:r>
             <a:r>
-              <a:rPr lang="ru-RU" sz="2000" dirty="0" smtClean="0"/>
+              <a:rPr lang="ru-RU" sz="2000" dirty="0"/>
               <a:t>) </a:t>
             </a:r>
             <a:r>
-              <a:rPr lang="ru-RU" sz="2000" b="1" dirty="0" smtClean="0"/>
+              <a:rPr lang="ru-RU" sz="2000" b="1" dirty="0"/>
               <a:t>нарушает казуальную структуру ВР</a:t>
             </a:r>
           </a:p>
@@ -10964,15 +10820,15 @@
               </a:spcBef>
             </a:pPr>
             <a:r>
-              <a:rPr lang="ru-RU" sz="2000" dirty="0" smtClean="0"/>
+              <a:rPr lang="ru-RU" sz="2000" dirty="0"/>
               <a:t>Связь между положениями окна, проходящего по ВР основывается только на результате предсказания – это может скрыть паттерны ВР </a:t>
             </a:r>
             <a:r>
-              <a:rPr lang="ru-RU" sz="2000" b="1" dirty="0" smtClean="0"/>
+              <a:rPr lang="ru-RU" sz="2000" b="1" dirty="0"/>
               <a:t>(неверный учет контекста)</a:t>
             </a:r>
             <a:r>
-              <a:rPr lang="ru-RU" sz="2000" dirty="0" smtClean="0"/>
+              <a:rPr lang="ru-RU" sz="2000" dirty="0"/>
               <a:t>.</a:t>
             </a:r>
           </a:p>
@@ -10986,7 +10842,7 @@
               </a:spcBef>
             </a:pPr>
             <a:r>
-              <a:rPr lang="ru-RU" sz="2000" b="1" dirty="0" smtClean="0"/>
+              <a:rPr lang="ru-RU" sz="2000" b="1" dirty="0"/>
               <a:t>Сложная интерпретация результатов</a:t>
             </a:r>
           </a:p>
@@ -11000,12 +10856,8 @@
               </a:spcBef>
             </a:pPr>
             <a:r>
-              <a:rPr lang="ru-RU" sz="2000" dirty="0" smtClean="0"/>
-              <a:t>Нет Возможности </a:t>
-            </a:r>
-            <a:r>
               <a:rPr lang="ru-RU" sz="2000" dirty="0"/>
-              <a:t>предсказания последовательности семплов за один шаг.</a:t>
+              <a:t>Нет Возможности предсказания последовательности семплов за один шаг.</a:t>
             </a:r>
           </a:p>
           <a:p>
@@ -11018,18 +10870,17 @@
               </a:spcBef>
             </a:pPr>
             <a:r>
-              <a:rPr lang="ru-RU" sz="2000" dirty="0" smtClean="0"/>
+              <a:rPr lang="ru-RU" sz="2000" dirty="0"/>
               <a:t>Сеть дает хуже результаты если </a:t>
             </a:r>
             <a:r>
-              <a:rPr lang="en-US" sz="2000" dirty="0" smtClean="0"/>
+              <a:rPr lang="en-US" sz="2000" dirty="0"/>
               <a:t>AR </a:t>
             </a:r>
             <a:r>
-              <a:rPr lang="ru-RU" sz="2000" dirty="0" smtClean="0"/>
+              <a:rPr lang="ru-RU" sz="2000" dirty="0"/>
               <a:t>работает</a:t>
             </a:r>
-            <a:endParaRPr lang="ru-RU" sz="2000" dirty="0"/>
           </a:p>
         </p:txBody>
       </p:sp>
@@ -11066,18 +10917,11 @@
   <p:clrMapOvr>
     <a:masterClrMapping/>
   </p:clrMapOvr>
-  <p:timing>
-    <p:tnLst>
-      <p:par>
-        <p:cTn id="1" dur="indefinite" restart="never" nodeType="tmRoot"/>
-      </p:par>
-    </p:tnLst>
-  </p:timing>
 </p:sld>
 </file>
 
 <file path=ppt/slides/slide20.xml><?xml version="1.0" encoding="utf-8"?>
-<p:sld xmlns:a="http://schemas.openxmlformats.org/drawingml/2006/main" xmlns:r="http://schemas.openxmlformats.org/officeDocument/2006/relationships" xmlns:p="http://schemas.openxmlformats.org/presentationml/2006/main">
+<p:sld xmlns:a="http://schemas.openxmlformats.org/drawingml/2006/main" xmlns:r="http://schemas.openxmlformats.org/officeDocument/2006/relationships" xmlns:p="http://schemas.openxmlformats.org/presentationml/2006/main" show="0">
   <p:cSld>
     <p:spTree>
       <p:nvGrpSpPr>
@@ -11117,7 +10961,7 @@
           <a:p>
             <a:pPr algn="ctr"/>
             <a:r>
-              <a:rPr lang="en-US" dirty="0" smtClean="0"/>
+              <a:rPr lang="en-US" dirty="0"/>
               <a:t>Deep AR</a:t>
             </a:r>
             <a:endParaRPr lang="ru-RU" dirty="0"/>
@@ -11156,7 +11000,7 @@
               <a:buNone/>
             </a:pPr>
             <a:r>
-              <a:rPr lang="ru-RU" sz="2500" b="1" dirty="0" smtClean="0"/>
+              <a:rPr lang="ru-RU" sz="2500" b="1" dirty="0"/>
               <a:t>Преимущества, особенности</a:t>
             </a:r>
           </a:p>
@@ -11170,24 +11014,8 @@
               </a:spcBef>
             </a:pPr>
             <a:r>
-              <a:rPr lang="ru-RU" sz="2500" dirty="0" smtClean="0"/>
-              <a:t>Вероятностное </a:t>
-            </a:r>
-            <a:r>
               <a:rPr lang="ru-RU" sz="2500" dirty="0"/>
-              <a:t>предсказание: </a:t>
-            </a:r>
-            <a:r>
-              <a:rPr lang="ru-RU" sz="2500" dirty="0" smtClean="0"/>
-              <a:t>предсказывает </a:t>
-            </a:r>
-            <a:r>
-              <a:rPr lang="ru-RU" sz="2500" dirty="0"/>
-              <a:t>распределение (например, нормальное, отрицательное биномиальное</a:t>
-            </a:r>
-            <a:r>
-              <a:rPr lang="ru-RU" sz="2500" dirty="0" smtClean="0"/>
-              <a:t>). Предсказание – медиана распределения.</a:t>
+              <a:t>Вероятностное предсказание: предсказывает распределение (например, нормальное, отрицательное биномиальное). Предсказание – медиана распределения.</a:t>
             </a:r>
           </a:p>
           <a:p>
@@ -11201,13 +11029,9 @@
             </a:pPr>
             <a:r>
               <a:rPr lang="ru-RU" sz="2500" dirty="0"/>
-              <a:t>Выбор распределение – подстройка к разным типам данных (напр. для счетных данных</a:t>
-            </a:r>
-            <a:r>
-              <a:rPr lang="ru-RU" sz="2500" dirty="0" smtClean="0"/>
-              <a:t>)</a:t>
-            </a:r>
-            <a:endParaRPr lang="en-US" sz="2500" dirty="0" smtClean="0"/>
+              <a:t>Выбор распределение – подстройка к разным типам данных (напр. для счетных данных)</a:t>
+            </a:r>
+            <a:endParaRPr lang="en-US" sz="2500" dirty="0"/>
           </a:p>
           <a:p>
             <a:pPr lvl="1">
@@ -11219,14 +11043,13 @@
               </a:spcBef>
             </a:pPr>
             <a:r>
-              <a:rPr lang="ru-RU" sz="2500" dirty="0" err="1" smtClean="0"/>
+              <a:rPr lang="ru-RU" sz="2500" dirty="0" err="1"/>
               <a:t>Лосс</a:t>
             </a:r>
             <a:r>
-              <a:rPr lang="ru-RU" sz="2500" dirty="0" smtClean="0"/>
+              <a:rPr lang="ru-RU" sz="2500" dirty="0"/>
               <a:t> – по распределению</a:t>
             </a:r>
-            <a:endParaRPr lang="ru-RU" sz="2500" dirty="0"/>
           </a:p>
           <a:p>
             <a:pPr>
@@ -11238,15 +11061,15 @@
               </a:spcBef>
             </a:pPr>
             <a:r>
-              <a:rPr lang="ru-RU" sz="2500" dirty="0" smtClean="0"/>
+              <a:rPr lang="ru-RU" sz="2500" dirty="0"/>
               <a:t>Авторегрессия на основе </a:t>
             </a:r>
             <a:r>
-              <a:rPr lang="en-US" sz="2500" dirty="0" smtClean="0"/>
+              <a:rPr lang="en-US" sz="2500" dirty="0"/>
               <a:t>RNN </a:t>
             </a:r>
             <a:r>
-              <a:rPr lang="ru-RU" sz="2500" dirty="0" smtClean="0"/>
+              <a:rPr lang="ru-RU" sz="2500" dirty="0"/>
               <a:t>моделирует динамику от времени.</a:t>
             </a:r>
           </a:p>
@@ -11260,7 +11083,7 @@
               </a:spcBef>
             </a:pPr>
             <a:r>
-              <a:rPr lang="ru-RU" sz="2500" dirty="0" smtClean="0"/>
+              <a:rPr lang="ru-RU" sz="2500" dirty="0"/>
               <a:t>Можно добавлять экзогенные факторы.</a:t>
             </a:r>
           </a:p>
@@ -11295,13 +11118,8 @@
             </a:pPr>
             <a:r>
               <a:rPr lang="ru-RU" sz="2500" dirty="0"/>
-              <a:t>Требуется </a:t>
-            </a:r>
-            <a:r>
-              <a:rPr lang="ru-RU" sz="2500" dirty="0" smtClean="0"/>
-              <a:t>много данных для обучения.</a:t>
-            </a:r>
-            <a:endParaRPr lang="ru-RU" sz="2500" dirty="0"/>
+              <a:t>Требуется много данных для обучения.</a:t>
+            </a:r>
           </a:p>
           <a:p>
             <a:pPr lvl="1">
@@ -11314,13 +11132,8 @@
             </a:pPr>
             <a:r>
               <a:rPr lang="ru-RU" sz="2500" dirty="0"/>
-              <a:t>Нет настройки модели для отдельных </a:t>
-            </a:r>
-            <a:r>
-              <a:rPr lang="ru-RU" sz="2500" dirty="0" smtClean="0"/>
-              <a:t>ВР.</a:t>
-            </a:r>
-            <a:endParaRPr lang="ru-RU" sz="2500" dirty="0"/>
+              <a:t>Нет настройки модели для отдельных ВР.</a:t>
+            </a:r>
           </a:p>
           <a:p>
             <a:pPr lvl="1">
@@ -11333,13 +11146,8 @@
             </a:pPr>
             <a:r>
               <a:rPr lang="ru-RU" sz="2500" dirty="0"/>
-              <a:t>Данные должны </a:t>
-            </a:r>
-            <a:r>
-              <a:rPr lang="ru-RU" sz="2500" dirty="0" smtClean="0"/>
-              <a:t>нормироваться.</a:t>
-            </a:r>
-            <a:endParaRPr lang="ru-RU" sz="2500" dirty="0"/>
+              <a:t>Данные должны нормироваться.</a:t>
+            </a:r>
           </a:p>
           <a:p>
             <a:pPr lvl="1">
@@ -11356,7 +11164,7 @@
             </a:r>
           </a:p>
           <a:p>
-            <a:endParaRPr lang="ru-RU" sz="2400" dirty="0" smtClean="0"/>
+            <a:endParaRPr lang="ru-RU" sz="2400" dirty="0"/>
           </a:p>
         </p:txBody>
       </p:sp>
@@ -11484,10 +11292,9 @@
           <a:lstStyle/>
           <a:p>
             <a:r>
-              <a:rPr lang="ru-RU" sz="1050" dirty="0" smtClean="0"/>
+              <a:rPr lang="ru-RU" sz="1050" dirty="0"/>
               <a:t>https://readmedium.com/deepar-mastering-time-series-forecasting-with-deep-learning-bc717771ce85</a:t>
             </a:r>
-            <a:endParaRPr lang="ru-RU" sz="1050" dirty="0"/>
           </a:p>
         </p:txBody>
       </p:sp>
@@ -11573,18 +11380,17 @@
           <a:p>
             <a:pPr algn="ctr"/>
             <a:r>
-              <a:rPr lang="ru-RU" b="1" dirty="0" smtClean="0"/>
+              <a:rPr lang="ru-RU" b="1" dirty="0"/>
               <a:t>Проблемы </a:t>
             </a:r>
             <a:r>
-              <a:rPr lang="en-US" b="1" dirty="0" smtClean="0"/>
+              <a:rPr lang="en-US" b="1" dirty="0"/>
               <a:t>MLP </a:t>
             </a:r>
             <a:r>
-              <a:rPr lang="ru-RU" b="1" dirty="0" smtClean="0"/>
+              <a:rPr lang="ru-RU" b="1" dirty="0"/>
               <a:t>подхода для сложных паттернов</a:t>
             </a:r>
-            <a:endParaRPr lang="ru-RU" b="1" dirty="0"/>
           </a:p>
         </p:txBody>
       </p:sp>
@@ -11622,22 +11428,22 @@
                   <a:buNone/>
                 </a:pPr>
                 <a:r>
-                  <a:rPr lang="en-US" sz="2200" dirty="0" smtClean="0"/>
+                  <a:rPr lang="en-US" sz="2200" dirty="0"/>
                   <a:t>MLP </a:t>
                 </a:r>
                 <a:r>
-                  <a:rPr lang="ru-RU" sz="2200" dirty="0" smtClean="0"/>
+                  <a:rPr lang="ru-RU" sz="2200" dirty="0"/>
                   <a:t>предсказание</a:t>
                 </a:r>
                 <a:r>
-                  <a:rPr lang="en-US" sz="2200" dirty="0" smtClean="0"/>
+                  <a:rPr lang="en-US" sz="2200" dirty="0"/>
                   <a:t> (AR-NET)</a:t>
                 </a:r>
                 <a:r>
-                  <a:rPr lang="ru-RU" sz="2200" dirty="0" smtClean="0"/>
+                  <a:rPr lang="ru-RU" sz="2200" dirty="0"/>
                   <a:t> можно описать как</a:t>
                 </a:r>
-                <a:endParaRPr lang="en-US" sz="2200" dirty="0" smtClean="0"/>
+                <a:endParaRPr lang="en-US" sz="2200" dirty="0"/>
               </a:p>
               <a:p>
                 <a:pPr marL="0" indent="0" algn="ctr">
@@ -11650,7 +11456,7 @@
                   <a:buNone/>
                 </a:pPr>
                 <a:r>
-                  <a:rPr lang="ru-RU" sz="2200" dirty="0" smtClean="0"/>
+                  <a:rPr lang="ru-RU" sz="2200" dirty="0"/>
                   <a:t> </a:t>
                 </a:r>
                 <a14:m>
@@ -11946,7 +11752,7 @@
                     </m:nary>
                   </m:oMath>
                 </a14:m>
-                <a:endParaRPr lang="en-US" sz="2200" dirty="0" smtClean="0"/>
+                <a:endParaRPr lang="en-US" sz="2200" dirty="0"/>
               </a:p>
               <a:p>
                 <a:pPr marL="0" indent="0">
@@ -11959,7 +11765,7 @@
                   <a:buNone/>
                 </a:pPr>
                 <a:r>
-                  <a:rPr lang="ru-RU" sz="2200" dirty="0" smtClean="0"/>
+                  <a:rPr lang="ru-RU" sz="2200" dirty="0"/>
                   <a:t>Таким образом предсказание – результат обработки окна размером </a:t>
                 </a:r>
                 <a14:m>
@@ -11991,7 +11797,7 @@
                     </m:sSub>
                   </m:oMath>
                 </a14:m>
-                <a:endParaRPr lang="ru-RU" sz="2200" dirty="0" smtClean="0"/>
+                <a:endParaRPr lang="ru-RU" sz="2200" dirty="0"/>
               </a:p>
               <a:p>
                 <a:pPr marL="0" indent="0">
@@ -12004,7 +11810,7 @@
                   <a:buNone/>
                 </a:pPr>
                 <a:r>
-                  <a:rPr lang="ru-RU" sz="2200" dirty="0" smtClean="0"/>
+                  <a:rPr lang="ru-RU" sz="2200" dirty="0"/>
                   <a:t>Недостаток такой модели – контекст окружения окна  (память) не учитывается </a:t>
                 </a:r>
               </a:p>
@@ -12019,7 +11825,7 @@
                   <a:buNone/>
                 </a:pPr>
                 <a:r>
-                  <a:rPr lang="ru-RU" sz="2200" dirty="0" smtClean="0"/>
+                  <a:rPr lang="ru-RU" sz="2200" dirty="0"/>
                   <a:t>	или учитывается неявно, когда заменяем </a:t>
                 </a:r>
                 <a14:m>
@@ -12064,7 +11870,7 @@
                   </m:oMath>
                 </a14:m>
                 <a:r>
-                  <a:rPr lang="ru-RU" sz="2200" dirty="0" smtClean="0"/>
+                  <a:rPr lang="ru-RU" sz="2200" dirty="0"/>
                   <a:t> на </a:t>
                 </a:r>
                 <a14:m>
@@ -12126,7 +11932,7 @@
                     </m:r>
                   </m:oMath>
                 </a14:m>
-                <a:endParaRPr lang="ru-RU" sz="2200" b="0" i="0" dirty="0" smtClean="0">
+                <a:endParaRPr lang="ru-RU" sz="2200" b="0" i="0" dirty="0">
                   <a:latin typeface="+mj-lt"/>
                 </a:endParaRPr>
               </a:p>
@@ -12147,7 +11953,7 @@
                   <a:t>	</a:t>
                 </a:r>
                 <a:r>
-                  <a:rPr lang="ru-RU" sz="2200" b="0" i="0" dirty="0" smtClean="0">
+                  <a:rPr lang="ru-RU" sz="2200" b="0" i="0" dirty="0">
                     <a:latin typeface="+mj-lt"/>
                   </a:rPr>
                   <a:t>но тогда не учитываются ошибки </a:t>
@@ -12195,11 +12001,7 @@
                 </a14:m>
                 <a:r>
                   <a:rPr lang="ru-RU" sz="2200" dirty="0"/>
-                  <a:t> </a:t>
-                </a:r>
-                <a:r>
-                  <a:rPr lang="ru-RU" sz="2200" dirty="0" smtClean="0"/>
-                  <a:t>- </a:t>
+                  <a:t> - </a:t>
                 </a:r>
                 <a14:m>
                   <m:oMath xmlns:m="http://schemas.openxmlformats.org/officeDocument/2006/math">
@@ -12254,7 +12056,7 @@
                     </m:sSub>
                   </m:oMath>
                 </a14:m>
-                <a:endParaRPr lang="ru-RU" sz="2200" dirty="0" smtClean="0"/>
+                <a:endParaRPr lang="ru-RU" sz="2200" dirty="0"/>
               </a:p>
               <a:p>
                 <a:pPr marL="0" indent="0">
@@ -12267,7 +12069,7 @@
                   <a:buNone/>
                 </a:pPr>
                 <a:r>
-                  <a:rPr lang="ru-RU" sz="2200" dirty="0" smtClean="0"/>
+                  <a:rPr lang="ru-RU" sz="2200" dirty="0"/>
                   <a:t>Если во ВР есть сложные паттерны, непопадающие в окно </a:t>
                 </a:r>
                 <a14:m>
@@ -12300,7 +12102,7 @@
                   </m:oMath>
                 </a14:m>
                 <a:r>
-                  <a:rPr lang="ru-RU" sz="2200" dirty="0" smtClean="0"/>
+                  <a:rPr lang="ru-RU" sz="2200" dirty="0"/>
                   <a:t> их влияние не учитывается (а оно есть) – ошибки предсказания растет. </a:t>
                 </a:r>
               </a:p>
@@ -12315,7 +12117,7 @@
                   <a:buNone/>
                 </a:pPr>
                 <a:r>
-                  <a:rPr lang="ru-RU" sz="2200" dirty="0" smtClean="0"/>
+                  <a:rPr lang="ru-RU" sz="2200" dirty="0"/>
                   <a:t>	Это особенно плохо для среднесрочных и долгосрочных предсказаний.</a:t>
                 </a:r>
               </a:p>
@@ -12329,7 +12131,7 @@
                   </a:spcBef>
                   <a:buNone/>
                 </a:pPr>
-                <a:endParaRPr lang="ru-RU" sz="2200" dirty="0" smtClean="0"/>
+                <a:endParaRPr lang="ru-RU" sz="2200" dirty="0"/>
               </a:p>
             </p:txBody>
           </p:sp>
@@ -12447,16 +12249,15 @@
           <a:lstStyle/>
           <a:p>
             <a:r>
-              <a:rPr lang="ru-RU" dirty="0" smtClean="0"/>
+              <a:rPr lang="ru-RU" dirty="0"/>
               <a:t>Выбор неправильных параметров модели может привести к ошибке.</a:t>
             </a:r>
           </a:p>
           <a:p>
             <a:r>
-              <a:rPr lang="ru-RU" dirty="0" smtClean="0"/>
+              <a:rPr lang="ru-RU" dirty="0"/>
               <a:t>Напр. на коротком окне тренд вместо степенного можно воспринять как линейный</a:t>
             </a:r>
-            <a:endParaRPr lang="ru-RU" dirty="0"/>
           </a:p>
         </p:txBody>
       </p:sp>
@@ -12470,13 +12271,6 @@
   <p:clrMapOvr>
     <a:masterClrMapping/>
   </p:clrMapOvr>
-  <p:timing>
-    <p:tnLst>
-      <p:par>
-        <p:cTn id="1" dur="indefinite" restart="never" nodeType="tmRoot"/>
-      </p:par>
-    </p:tnLst>
-  </p:timing>
 </p:sld>
 </file>
 
@@ -12521,10 +12315,9 @@
           <a:p>
             <a:pPr algn="ctr"/>
             <a:r>
-              <a:rPr lang="ru-RU" b="1" dirty="0" smtClean="0"/>
+              <a:rPr lang="ru-RU" b="1" dirty="0"/>
               <a:t>Рекуррентные подходы.</a:t>
             </a:r>
-            <a:endParaRPr lang="ru-RU" b="1" dirty="0"/>
           </a:p>
         </p:txBody>
       </p:sp>
@@ -12556,29 +12349,29 @@
                   <a:buNone/>
                 </a:pPr>
                 <a:r>
-                  <a:rPr lang="en-US" sz="2400" dirty="0" smtClean="0"/>
+                  <a:rPr lang="en-US" sz="2400" dirty="0"/>
                   <a:t>MLP </a:t>
                 </a:r>
                 <a:r>
-                  <a:rPr lang="ru-RU" sz="2400" dirty="0" smtClean="0"/>
+                  <a:rPr lang="ru-RU" sz="2400" dirty="0"/>
                   <a:t>предсказание</a:t>
                 </a:r>
                 <a:r>
-                  <a:rPr lang="en-US" sz="2400" dirty="0" smtClean="0"/>
+                  <a:rPr lang="en-US" sz="2400" dirty="0"/>
                   <a:t> (AR-NET)</a:t>
                 </a:r>
                 <a:r>
-                  <a:rPr lang="ru-RU" sz="2400" dirty="0" smtClean="0"/>
+                  <a:rPr lang="ru-RU" sz="2400" dirty="0"/>
                   <a:t> можно описать как</a:t>
                 </a:r>
-                <a:endParaRPr lang="en-US" sz="2400" dirty="0" smtClean="0"/>
+                <a:endParaRPr lang="en-US" sz="2400" dirty="0"/>
               </a:p>
               <a:p>
                 <a:pPr marL="0" indent="0" algn="ctr">
                   <a:buNone/>
                 </a:pPr>
                 <a:r>
-                  <a:rPr lang="ru-RU" sz="2400" dirty="0" smtClean="0"/>
+                  <a:rPr lang="ru-RU" sz="2400" dirty="0"/>
                   <a:t> </a:t>
                 </a:r>
                 <a14:m>
@@ -12982,14 +12775,14 @@
                     </m:r>
                   </m:oMath>
                 </a14:m>
-                <a:endParaRPr lang="en-US" sz="2400" dirty="0" smtClean="0"/>
+                <a:endParaRPr lang="en-US" sz="2400" dirty="0"/>
               </a:p>
               <a:p>
                 <a:pPr marL="0" indent="0" algn="ctr">
                   <a:buNone/>
                 </a:pPr>
                 <a:r>
-                  <a:rPr lang="ru-RU" sz="2400" dirty="0" smtClean="0"/>
+                  <a:rPr lang="ru-RU" sz="2400" dirty="0"/>
                   <a:t>где </a:t>
                 </a:r>
                 <a14:m>
@@ -13063,14 +12856,14 @@
                   </m:oMath>
                 </a14:m>
                 <a:r>
-                  <a:rPr lang="en-US" sz="2400" b="0" i="0" dirty="0" smtClean="0">
+                  <a:rPr lang="en-US" sz="2400" b="0" i="0" dirty="0">
                     <a:latin typeface="+mj-lt"/>
                     <a:ea typeface="Cambria Math" panose="02040503050406030204" pitchFamily="18" charset="0"/>
                   </a:rPr>
                   <a:t>-</a:t>
                 </a:r>
                 <a:r>
-                  <a:rPr lang="ru-RU" sz="2400" b="0" i="0" dirty="0" smtClean="0">
+                  <a:rPr lang="ru-RU" sz="2400" b="0" i="0" dirty="0">
                     <a:latin typeface="+mj-lt"/>
                     <a:ea typeface="Cambria Math" panose="02040503050406030204" pitchFamily="18" charset="0"/>
                   </a:rPr>
@@ -13087,15 +12880,15 @@
                   <a:buNone/>
                 </a:pPr>
                 <a:r>
-                  <a:rPr lang="ru-RU" sz="2400" dirty="0" smtClean="0"/>
+                  <a:rPr lang="ru-RU" sz="2400" dirty="0"/>
                   <a:t>Пусть мы хотим учитывать предыдущие состояние</a:t>
                 </a:r>
                 <a:r>
-                  <a:rPr lang="en-US" sz="2400" dirty="0" smtClean="0"/>
+                  <a:rPr lang="en-US" sz="2400" dirty="0"/>
                   <a:t> </a:t>
                 </a:r>
                 <a:r>
-                  <a:rPr lang="ru-RU" sz="2400" dirty="0" smtClean="0"/>
+                  <a:rPr lang="ru-RU" sz="2400" dirty="0"/>
                   <a:t>слоя </a:t>
                 </a:r>
                 <a14:m>
@@ -13131,7 +12924,7 @@
                   </m:oMath>
                 </a14:m>
                 <a:r>
-                  <a:rPr lang="ru-RU" sz="2400" dirty="0" smtClean="0"/>
+                  <a:rPr lang="ru-RU" sz="2400" dirty="0"/>
                   <a:t> при моделировании текущего состояния</a:t>
                 </a:r>
               </a:p>
@@ -13140,7 +12933,7 @@
                   <a:buNone/>
                 </a:pPr>
                 <a:r>
-                  <a:rPr lang="ru-RU" sz="2400" dirty="0" smtClean="0"/>
+                  <a:rPr lang="ru-RU" sz="2400" dirty="0"/>
                   <a:t> </a:t>
                 </a:r>
                 <a14:m>
@@ -13404,7 +13197,7 @@
                   </m:oMath>
                 </a14:m>
                 <a:r>
-                  <a:rPr lang="ru-RU" sz="2400" b="0" i="0" dirty="0" smtClean="0">
+                  <a:rPr lang="ru-RU" sz="2400" b="0" i="0" dirty="0">
                     <a:latin typeface="+mj-lt"/>
                     <a:ea typeface="Cambria Math" panose="02040503050406030204" pitchFamily="18" charset="0"/>
                   </a:rPr>
@@ -13416,7 +13209,7 @@
                   <a:buNone/>
                 </a:pPr>
                 <a:r>
-                  <a:rPr lang="ru-RU" sz="2400" dirty="0" smtClean="0">
+                  <a:rPr lang="ru-RU" sz="2400" dirty="0">
                     <a:ea typeface="Cambria Math" panose="02040503050406030204" pitchFamily="18" charset="0"/>
                   </a:rPr>
                   <a:t>где </a:t>
@@ -13510,49 +13303,49 @@
                   </m:oMath>
                 </a14:m>
                 <a:r>
-                  <a:rPr lang="ru-RU" sz="2400" b="0" i="0" dirty="0" smtClean="0">
+                  <a:rPr lang="ru-RU" sz="2400" b="0" i="0" dirty="0">
                     <a:latin typeface="+mj-lt"/>
                     <a:ea typeface="Cambria Math" panose="02040503050406030204" pitchFamily="18" charset="0"/>
                   </a:rPr>
                   <a:t> </a:t>
                 </a:r>
                 <a:r>
-                  <a:rPr lang="ru-RU" sz="2400" dirty="0" smtClean="0">
+                  <a:rPr lang="ru-RU" sz="2400" dirty="0">
                     <a:latin typeface="+mj-lt"/>
                     <a:ea typeface="Cambria Math" panose="02040503050406030204" pitchFamily="18" charset="0"/>
                   </a:rPr>
                   <a:t>влияние </a:t>
                 </a:r>
                 <a:r>
-                  <a:rPr lang="ru-RU" sz="2400" b="0" i="0" dirty="0" smtClean="0">
+                  <a:rPr lang="ru-RU" sz="2400" b="0" i="0" dirty="0">
                     <a:latin typeface="+mj-lt"/>
                     <a:ea typeface="Cambria Math" panose="02040503050406030204" pitchFamily="18" charset="0"/>
                   </a:rPr>
                   <a:t>предыдущего состояния (контекст/память/ функция перехода </a:t>
                 </a:r>
                 <a:r>
-                  <a:rPr lang="en-US" sz="2400" b="0" i="0" dirty="0" smtClean="0">
+                  <a:rPr lang="en-US" sz="2400" b="0" i="0" dirty="0">
                     <a:latin typeface="+mj-lt"/>
                     <a:ea typeface="Cambria Math" panose="02040503050406030204" pitchFamily="18" charset="0"/>
                   </a:rPr>
                   <a:t>/ </a:t>
                 </a:r>
                 <a:r>
-                  <a:rPr lang="ru-RU" sz="2400" b="0" i="0" dirty="0" smtClean="0">
+                  <a:rPr lang="ru-RU" sz="2400" b="0" i="0" dirty="0">
                     <a:latin typeface="+mj-lt"/>
                     <a:ea typeface="Cambria Math" panose="02040503050406030204" pitchFamily="18" charset="0"/>
                   </a:rPr>
                   <a:t>скрытое состояние ВР – </a:t>
                 </a:r>
                 <a:r>
-                  <a:rPr lang="en-US" sz="2400" b="0" i="0" dirty="0" smtClean="0">
+                  <a:rPr lang="en-US" sz="2400" b="0" i="0" dirty="0">
                     <a:latin typeface="+mj-lt"/>
                     <a:ea typeface="Cambria Math" panose="02040503050406030204" pitchFamily="18" charset="0"/>
                   </a:rPr>
                   <a:t>hidden state (h)</a:t>
                 </a:r>
                 <a:r>
-                  <a:rPr lang="ru-RU" sz="2400" b="0" i="0" dirty="0" smtClean="0">
+                  <a:rPr lang="ru-RU" sz="2400" b="0" i="0" dirty="0">
                     <a:latin typeface="+mj-lt"/>
                     <a:ea typeface="Cambria Math" panose="02040503050406030204" pitchFamily="18" charset="0"/>
                   </a:rPr>
@@ -13569,7 +13362,7 @@
                     </m:r>
                   </m:oMath>
                 </a14:m>
-                <a:endParaRPr lang="ru-RU" sz="2400" dirty="0" smtClean="0"/>
+                <a:endParaRPr lang="ru-RU" sz="2400" dirty="0"/>
               </a:p>
               <a:p>
                 <a:pPr marL="0" indent="0" algn="ctr">
@@ -14003,17 +13796,17 @@
                   </m:oMath>
                 </a14:m>
                 <a:r>
-                  <a:rPr lang="ru-RU" sz="2400" dirty="0" smtClean="0"/>
+                  <a:rPr lang="ru-RU" sz="2400" dirty="0"/>
                   <a:t> </a:t>
                 </a:r>
-                <a:endParaRPr lang="en-US" sz="2400" dirty="0" smtClean="0"/>
+                <a:endParaRPr lang="en-US" sz="2400" dirty="0"/>
               </a:p>
               <a:p>
                 <a:pPr marL="0" indent="0">
                   <a:buNone/>
                 </a:pPr>
                 <a:r>
-                  <a:rPr lang="ru-RU" sz="2400" dirty="0" smtClean="0"/>
+                  <a:rPr lang="ru-RU" sz="2400" dirty="0"/>
                   <a:t>где</a:t>
                 </a:r>
                 <a14:m>
@@ -14052,11 +13845,11 @@
                   </m:oMath>
                 </a14:m>
                 <a:r>
-                  <a:rPr lang="en-US" sz="2400" dirty="0" smtClean="0"/>
+                  <a:rPr lang="en-US" sz="2400" dirty="0"/>
                   <a:t> - </a:t>
                 </a:r>
                 <a:r>
-                  <a:rPr lang="ru-RU" sz="2400" dirty="0" smtClean="0"/>
+                  <a:rPr lang="ru-RU" sz="2400" dirty="0"/>
                   <a:t>вектор предыдущих состояний для шага </a:t>
                 </a:r>
                 <a14:m>
@@ -14070,7 +13863,7 @@
                   </m:oMath>
                 </a14:m>
                 <a:r>
-                  <a:rPr lang="ru-RU" sz="2400" dirty="0" smtClean="0"/>
+                  <a:rPr lang="ru-RU" sz="2400" dirty="0"/>
                   <a:t>, </a:t>
                 </a:r>
                 <a14:m>
@@ -14111,15 +13904,15 @@
                   </m:oMath>
                 </a14:m>
                 <a:r>
-                  <a:rPr lang="ru-RU" sz="2400" dirty="0" smtClean="0"/>
+                  <a:rPr lang="ru-RU" sz="2400" dirty="0"/>
                   <a:t> - коэффициенты слоя перехода от состояния </a:t>
                 </a:r>
                 <a:r>
-                  <a:rPr lang="en-US" sz="2400" dirty="0" smtClean="0"/>
+                  <a:rPr lang="en-US" sz="2400" dirty="0"/>
                   <a:t>n </a:t>
                 </a:r>
                 <a:r>
-                  <a:rPr lang="ru-RU" sz="2400" dirty="0" smtClean="0"/>
+                  <a:rPr lang="ru-RU" sz="2400" dirty="0"/>
                   <a:t>к состоянию </a:t>
                 </a:r>
                 <a14:m>
@@ -14139,10 +13932,10 @@
                   </m:oMath>
                 </a14:m>
                 <a:r>
-                  <a:rPr lang="ru-RU" sz="2400" dirty="0" smtClean="0"/>
+                  <a:rPr lang="ru-RU" sz="2400" dirty="0"/>
                   <a:t>.</a:t>
                 </a:r>
-                <a:endParaRPr lang="en-US" sz="2400" dirty="0" smtClean="0"/>
+                <a:endParaRPr lang="en-US" sz="2400" dirty="0"/>
               </a:p>
             </p:txBody>
           </p:sp>
@@ -14223,13 +14016,6 @@
   <p:clrMapOvr>
     <a:masterClrMapping/>
   </p:clrMapOvr>
-  <p:timing>
-    <p:tnLst>
-      <p:par>
-        <p:cTn id="1" dur="indefinite" restart="never" nodeType="tmRoot"/>
-      </p:par>
-    </p:tnLst>
-  </p:timing>
 </p:sld>
 </file>
 
@@ -14278,12 +14064,12 @@
                   <a:buNone/>
                 </a:pPr>
                 <a:r>
-                  <a:rPr lang="ru-RU" sz="2200" i="1" dirty="0" smtClean="0">
+                  <a:rPr lang="ru-RU" sz="2200" i="1" dirty="0">
                     <a:latin typeface="Cambria Math" panose="02040503050406030204" pitchFamily="18" charset="0"/>
                   </a:rPr>
                   <a:t>Перепишем уравнение</a:t>
                 </a:r>
-                <a:endParaRPr lang="en-US" sz="2200" i="1" dirty="0" smtClean="0">
+                <a:endParaRPr lang="en-US" sz="2200" i="1" dirty="0">
                   <a:latin typeface="Cambria Math" panose="02040503050406030204" pitchFamily="18" charset="0"/>
                 </a:endParaRPr>
               </a:p>
@@ -14899,11 +14685,11 @@
                     </m:oMath>
                   </m:oMathPara>
                 </a14:m>
-                <a:endParaRPr lang="en-US" sz="2200" dirty="0" smtClean="0"/>
+                <a:endParaRPr lang="en-US" sz="2200" dirty="0"/>
               </a:p>
               <a:p>
                 <a:r>
-                  <a:rPr lang="ru-RU" sz="2200" dirty="0" smtClean="0"/>
+                  <a:rPr lang="ru-RU" sz="2200" dirty="0"/>
                   <a:t>Сеть </a:t>
                 </a:r>
                 <a:r>
@@ -14912,21 +14698,17 @@
                 </a:r>
                 <a:r>
                   <a:rPr lang="ru-RU" sz="2200" dirty="0"/>
-                  <a:t> </a:t>
-                </a:r>
-                <a:r>
-                  <a:rPr lang="ru-RU" sz="2200" dirty="0" smtClean="0"/>
-                  <a:t>или </a:t>
+                  <a:t> или </a:t>
                 </a:r>
                 <a:r>
                   <a:rPr lang="en-US" sz="2200" dirty="0"/>
                   <a:t>Simple RNN/Vanilla RNN</a:t>
                 </a:r>
                 <a:r>
-                  <a:rPr lang="ru-RU" sz="2200" dirty="0" smtClean="0"/>
+                  <a:rPr lang="ru-RU" sz="2200" dirty="0"/>
                   <a:t>:</a:t>
                 </a:r>
-                <a:endParaRPr lang="en-US" sz="2200" dirty="0" smtClean="0"/>
+                <a:endParaRPr lang="en-US" sz="2200" dirty="0"/>
               </a:p>
               <a:p>
                 <a:pPr marL="0" indent="0">
@@ -15787,7 +15569,7 @@
                     </m:oMath>
                   </m:oMathPara>
                 </a14:m>
-                <a:endParaRPr lang="ru-RU" sz="2200" dirty="0" smtClean="0"/>
+                <a:endParaRPr lang="ru-RU" sz="2200" dirty="0"/>
               </a:p>
               <a:p>
                 <a:pPr marL="0" indent="0">
@@ -15915,7 +15697,7 @@
                 <a:pPr marL="0" indent="0">
                   <a:buNone/>
                 </a:pPr>
-                <a:endParaRPr lang="en-US" sz="2200" dirty="0" smtClean="0"/>
+                <a:endParaRPr lang="en-US" sz="2200" dirty="0"/>
               </a:p>
               <a:p>
                 <a:endParaRPr lang="ru-RU" sz="2200" dirty="0"/>
@@ -16207,14 +15989,10 @@
           <a:p>
             <a:r>
               <a:rPr lang="en-US" sz="1400" dirty="0"/>
-              <a:t>https://</a:t>
-            </a:r>
-            <a:r>
-              <a:rPr lang="en-US" sz="1400" dirty="0" smtClean="0"/>
-              <a:t>neerc.ifmo.ru/wiki/index.php?title=</a:t>
-            </a:r>
-            <a:r>
-              <a:rPr lang="ru-RU" sz="1400" dirty="0" err="1" smtClean="0"/>
+              <a:t>https://neerc.ifmo.ru/wiki/index.php?title=</a:t>
+            </a:r>
+            <a:r>
+              <a:rPr lang="ru-RU" sz="1400" dirty="0" err="1"/>
               <a:t>Рекуррентные_нейронные_сети</a:t>
             </a:r>
             <a:endParaRPr lang="ru-RU" sz="1400" dirty="0"/>
@@ -16665,7 +16443,7 @@
                     </m:oMath>
                   </m:oMathPara>
                 </a14:m>
-                <a:endParaRPr lang="en-US" dirty="0" smtClean="0"/>
+                <a:endParaRPr lang="en-US" dirty="0"/>
               </a:p>
               <a:p>
                 <a:endParaRPr lang="ru-RU" dirty="0"/>
@@ -16734,19 +16512,19 @@
           <a:lstStyle/>
           <a:p>
             <a:r>
-              <a:rPr lang="ru-RU" i="1" dirty="0" smtClean="0"/>
+              <a:rPr lang="ru-RU" i="1" dirty="0"/>
               <a:t>Могут также быть и другие формулировки </a:t>
             </a:r>
             <a:r>
-              <a:rPr lang="en-US" i="1" dirty="0" smtClean="0"/>
+              <a:rPr lang="en-US" i="1" dirty="0"/>
               <a:t>RNN, </a:t>
             </a:r>
             <a:r>
-              <a:rPr lang="ru-RU" i="1" dirty="0" smtClean="0"/>
+              <a:rPr lang="ru-RU" i="1" dirty="0"/>
               <a:t>например формулировка </a:t>
             </a:r>
             <a:r>
-              <a:rPr lang="ru-RU" i="1" dirty="0" err="1" smtClean="0"/>
+              <a:rPr lang="ru-RU" i="1" dirty="0" err="1"/>
               <a:t>Джордана</a:t>
             </a:r>
             <a:endParaRPr lang="ru-RU" i="1" dirty="0"/>
@@ -16763,21 +16541,6 @@
   <p:clrMapOvr>
     <a:masterClrMapping/>
   </p:clrMapOvr>
-  <mc:AlternateContent xmlns:mc="http://schemas.openxmlformats.org/markup-compatibility/2006" xmlns:p14="http://schemas.microsoft.com/office/powerpoint/2010/main">
-    <mc:Choice Requires="p14">
-      <p:transition spd="slow" p14:dur="2000"/>
-    </mc:Choice>
-    <mc:Fallback xmlns="">
-      <p:transition spd="slow"/>
-    </mc:Fallback>
-  </mc:AlternateContent>
-  <p:timing>
-    <p:tnLst>
-      <p:par>
-        <p:cTn id="1" dur="indefinite" restart="never" nodeType="tmRoot"/>
-      </p:par>
-    </p:tnLst>
-  </p:timing>
 </p:sld>
 </file>
 
@@ -16822,11 +16585,11 @@
           <a:p>
             <a:pPr algn="ctr" rtl="0"/>
             <a:r>
-              <a:rPr lang="en-US" b="1" dirty="0" smtClean="0"/>
+              <a:rPr lang="en-US" b="1" dirty="0"/>
               <a:t>RNN </a:t>
             </a:r>
             <a:r>
-              <a:rPr lang="ru-RU" b="1" dirty="0" smtClean="0"/>
+              <a:rPr lang="ru-RU" b="1" dirty="0"/>
               <a:t>Интуиция</a:t>
             </a:r>
             <a:endParaRPr lang="en-US" b="1" dirty="0"/>
@@ -16866,16 +16629,12 @@
                   </a:spcBef>
                 </a:pPr>
                 <a:r>
-                  <a:rPr lang="ru-RU" sz="2200" b="1" dirty="0" smtClean="0"/>
+                  <a:rPr lang="ru-RU" sz="2200" b="1" dirty="0"/>
                   <a:t>Рекуррентные нейронные сети (RNN)</a:t>
                 </a:r>
                 <a:r>
                   <a:rPr lang="ru-RU" sz="2200" dirty="0"/>
-                  <a:t>  </a:t>
-                </a:r>
-                <a:r>
-                  <a:rPr lang="ru-RU" sz="2200" dirty="0" smtClean="0"/>
-                  <a:t>обрабатывают последовательности:</a:t>
+                  <a:t>  обрабатывают последовательности:</a:t>
                 </a:r>
               </a:p>
               <a:p>
@@ -16888,7 +16647,7 @@
                   </a:spcBef>
                 </a:pPr>
                 <a:r>
-                  <a:rPr lang="ru-RU" sz="2200" dirty="0" smtClean="0"/>
+                  <a:rPr lang="ru-RU" sz="2200" dirty="0"/>
                   <a:t>На каждом шаге окна одни и те же веса </a:t>
                 </a:r>
                 <a14:m>
@@ -16920,15 +16679,15 @@
                   </m:oMath>
                 </a14:m>
                 <a:r>
-                  <a:rPr lang="en-US" sz="2200" dirty="0" smtClean="0"/>
+                  <a:rPr lang="en-US" sz="2200" dirty="0"/>
                   <a:t>)</a:t>
                 </a:r>
                 <a:r>
-                  <a:rPr lang="ru-RU" sz="2200" dirty="0" smtClean="0"/>
+                  <a:rPr lang="ru-RU" sz="2200" dirty="0"/>
                   <a:t>, но разные входные данные </a:t>
                 </a:r>
                 <a:r>
-                  <a:rPr lang="en-US" sz="2200" dirty="0" smtClean="0"/>
+                  <a:rPr lang="en-US" sz="2200" dirty="0"/>
                   <a:t>(</a:t>
                 </a:r>
                 <a14:m>
@@ -16998,7 +16757,7 @@
                   </m:oMath>
                 </a14:m>
                 <a:r>
-                  <a:rPr lang="ru-RU" sz="2200" dirty="0" smtClean="0"/>
+                  <a:rPr lang="ru-RU" sz="2200" dirty="0"/>
                   <a:t>.</a:t>
                 </a:r>
               </a:p>
@@ -17041,11 +16800,11 @@
                   </m:oMath>
                 </a14:m>
                 <a:r>
-                  <a:rPr lang="en-US" sz="1800" dirty="0" smtClean="0"/>
+                  <a:rPr lang="en-US" sz="1800" dirty="0"/>
                   <a:t> </a:t>
                 </a:r>
                 <a:r>
-                  <a:rPr lang="ru-RU" sz="1800" dirty="0" smtClean="0"/>
+                  <a:rPr lang="ru-RU" sz="1800" dirty="0"/>
                   <a:t>передается в следящее состояние как память.</a:t>
                 </a:r>
               </a:p>
@@ -17073,12 +16832,8 @@
                   </a:spcBef>
                 </a:pPr>
                 <a:r>
-                  <a:rPr lang="ru-RU" sz="2200" dirty="0" smtClean="0"/>
-                  <a:t>Традиционное </a:t>
-                </a:r>
-                <a:r>
                   <a:rPr lang="ru-RU" sz="2200" dirty="0"/>
-                  <a:t>применение RNN - обработка естественного языка.</a:t>
+                  <a:t>Традиционное применение RNN - обработка естественного языка.</a:t>
                 </a:r>
               </a:p>
               <a:p>
@@ -17091,20 +16846,8 @@
                   </a:spcBef>
                 </a:pPr>
                 <a:r>
-                  <a:rPr lang="ru-RU" sz="2200" dirty="0" smtClean="0"/>
-                  <a:t>В </a:t>
-                </a:r>
-                <a:r>
                   <a:rPr lang="ru-RU" sz="2200" dirty="0"/>
-                  <a:t>последние годы для </a:t>
-                </a:r>
-                <a:r>
-                  <a:rPr lang="ru-RU" sz="2200" dirty="0" smtClean="0"/>
-                  <a:t>ВР было </a:t>
-                </a:r>
-                <a:r>
-                  <a:rPr lang="ru-RU" sz="2200" dirty="0"/>
-                  <a:t>разработано много архитектур на основе RNN.</a:t>
+                  <a:t>В последние годы для ВР было разработано много архитектур на основе RNN.</a:t>
                 </a:r>
               </a:p>
               <a:p>
@@ -17855,21 +17598,6 @@
   <p:clrMapOvr>
     <a:masterClrMapping/>
   </p:clrMapOvr>
-  <mc:AlternateContent xmlns:mc="http://schemas.openxmlformats.org/markup-compatibility/2006" xmlns:p14="http://schemas.microsoft.com/office/powerpoint/2010/main">
-    <mc:Choice Requires="p14">
-      <p:transition spd="slow" p14:dur="2000"/>
-    </mc:Choice>
-    <mc:Fallback xmlns="">
-      <p:transition spd="slow"/>
-    </mc:Fallback>
-  </mc:AlternateContent>
-  <p:timing>
-    <p:tnLst>
-      <p:par>
-        <p:cTn id="1" dur="indefinite" restart="never" nodeType="tmRoot"/>
-      </p:par>
-    </p:tnLst>
-  </p:timing>
 </p:sld>
 </file>
 
@@ -17914,11 +17642,11 @@
           <a:p>
             <a:pPr algn="ctr" rtl="0"/>
             <a:r>
-              <a:rPr lang="en-US" b="1" dirty="0" smtClean="0"/>
+              <a:rPr lang="en-US" b="1" dirty="0"/>
               <a:t>RNN </a:t>
             </a:r>
             <a:r>
-              <a:rPr lang="ru-RU" b="1" dirty="0" smtClean="0"/>
+              <a:rPr lang="ru-RU" b="1" dirty="0"/>
               <a:t>типы подходов</a:t>
             </a:r>
             <a:endParaRPr lang="ru-RU" dirty="0"/>
@@ -18093,10 +17821,9 @@
           <a:lstStyle/>
           <a:p>
             <a:r>
-              <a:rPr lang="ru-RU" sz="1100" dirty="0" smtClean="0"/>
+              <a:rPr lang="ru-RU" sz="1100" dirty="0"/>
               <a:t>https://www.bpesquet.fr/mlhandbook/algorithms/recurrent_neural_networks.html#rnn-fundamentals</a:t>
             </a:r>
-            <a:endParaRPr lang="ru-RU" sz="1100" dirty="0"/>
           </a:p>
         </p:txBody>
       </p:sp>
@@ -18110,21 +17837,6 @@
   <p:clrMapOvr>
     <a:masterClrMapping/>
   </p:clrMapOvr>
-  <mc:AlternateContent xmlns:mc="http://schemas.openxmlformats.org/markup-compatibility/2006" xmlns:p14="http://schemas.microsoft.com/office/powerpoint/2010/main">
-    <mc:Choice Requires="p14">
-      <p:transition spd="slow" p14:dur="2000"/>
-    </mc:Choice>
-    <mc:Fallback xmlns="">
-      <p:transition spd="slow"/>
-    </mc:Fallback>
-  </mc:AlternateContent>
-  <p:timing>
-    <p:tnLst>
-      <p:par>
-        <p:cTn id="1" dur="indefinite" restart="never" nodeType="tmRoot"/>
-      </p:par>
-    </p:tnLst>
-  </p:timing>
 </p:sld>
 </file>
 
@@ -18169,18 +17881,17 @@
           <a:p>
             <a:pPr algn="ctr"/>
             <a:r>
-              <a:rPr lang="en-US" b="1" dirty="0" smtClean="0"/>
+              <a:rPr lang="en-US" b="1" dirty="0"/>
               <a:t>RNN. </a:t>
             </a:r>
             <a:r>
-              <a:rPr lang="ru-RU" b="1" dirty="0" smtClean="0"/>
+              <a:rPr lang="ru-RU" b="1" dirty="0"/>
               <a:t>Особенности обучения</a:t>
             </a:r>
             <a:r>
-              <a:rPr lang="en-US" b="1" dirty="0" smtClean="0"/>
+              <a:rPr lang="en-US" b="1" dirty="0"/>
               <a:t> </a:t>
             </a:r>
-            <a:endParaRPr lang="en-US" b="1" dirty="0"/>
           </a:p>
         </p:txBody>
       </p:sp>
@@ -20696,12 +20407,8 @@
                   </a:spcBef>
                 </a:pPr>
                 <a:r>
-                  <a:rPr lang="ru-RU" sz="2600" dirty="0" smtClean="0"/>
-                  <a:t>Такая </a:t>
-                </a:r>
-                <a:r>
                   <a:rPr lang="ru-RU" sz="2600" dirty="0"/>
-                  <a:t>же рекуррентен зависимость будет при обновлении </a:t>
+                  <a:t>Такая же рекуррентен зависимость будет при обновлении </a:t>
                 </a:r>
                 <a14:m>
                   <m:oMath xmlns:m="http://schemas.openxmlformats.org/officeDocument/2006/math">
@@ -20765,12 +20472,8 @@
                   <a:buNone/>
                 </a:pPr>
                 <a:r>
-                  <a:rPr lang="ru-RU" sz="3400" dirty="0" smtClean="0"/>
-                  <a:t>Для </a:t>
-                </a:r>
-                <a:r>
                   <a:rPr lang="ru-RU" sz="3400" dirty="0"/>
-                  <a:t>вычисления градиента </a:t>
+                  <a:t>Для вычисления градиента </a:t>
                 </a:r>
                 <a14:m>
                   <m:oMath xmlns:m="http://schemas.openxmlformats.org/officeDocument/2006/math">
@@ -20783,12 +20486,8 @@
                   </m:oMath>
                 </a14:m>
                 <a:r>
-                  <a:rPr lang="ru-RU" sz="3400" dirty="0" smtClean="0"/>
-                  <a:t> </a:t>
-                </a:r>
-                <a:r>
                   <a:rPr lang="ru-RU" sz="3400" dirty="0"/>
-                  <a:t>на шаге </a:t>
+                  <a:t> на шаге </a:t>
                 </a:r>
                 <a14:m>
                   <m:oMath xmlns:m="http://schemas.openxmlformats.org/officeDocument/2006/math">
@@ -20853,12 +20552,8 @@
                   </a:spcBef>
                 </a:pPr>
                 <a:r>
-                  <a:rPr lang="ru-RU" sz="2600" dirty="0" smtClean="0"/>
-                  <a:t>Аналогично </a:t>
-                </a:r>
-                <a:r>
                   <a:rPr lang="ru-RU" sz="2600" dirty="0"/>
-                  <a:t>для весовых коэффициентов </a:t>
+                  <a:t>Аналогично для весовых коэффициентов </a:t>
                 </a:r>
                 <a14:m>
                   <m:oMath xmlns:m="http://schemas.openxmlformats.org/officeDocument/2006/math">
@@ -20958,12 +20653,8 @@
                   </a:spcBef>
                 </a:pPr>
                 <a:r>
-                  <a:rPr lang="ru-RU" sz="2600" dirty="0" smtClean="0"/>
-                  <a:t>Аналогично </a:t>
-                </a:r>
-                <a:r>
                   <a:rPr lang="ru-RU" sz="2600" dirty="0"/>
-                  <a:t>для вымывания градиента.</a:t>
+                  <a:t>Аналогично для вымывания градиента.</a:t>
                 </a:r>
               </a:p>
               <a:p>
@@ -21044,16 +20735,10 @@
               <a:t>отметим, что следствием высокой вероятности переобучения является не возможность сделать рекуррентные сети слишком глубокими. </a:t>
             </a:r>
             <a:r>
-              <a:rPr lang="ru-RU" altLang="ru-RU" sz="1600" dirty="0" smtClean="0">
-                <a:latin typeface="-apple-system"/>
-              </a:rPr>
-              <a:t>Архитектуры</a:t>
-            </a:r>
-            <a:r>
               <a:rPr lang="ru-RU" altLang="ru-RU" sz="1600" dirty="0">
                 <a:latin typeface="-apple-system"/>
               </a:rPr>
-              <a:t>, содержащие более 4 двунаправленных слоев это редкость</a:t>
+              <a:t>Архитектуры, содержащие более 4 двунаправленных слоев это редкость</a:t>
             </a:r>
             <a:endParaRPr lang="ru-RU" sz="1600" dirty="0"/>
           </a:p>
@@ -21069,21 +20754,6 @@
   <p:clrMapOvr>
     <a:masterClrMapping/>
   </p:clrMapOvr>
-  <mc:AlternateContent xmlns:mc="http://schemas.openxmlformats.org/markup-compatibility/2006" xmlns:p14="http://schemas.microsoft.com/office/powerpoint/2010/main">
-    <mc:Choice Requires="p14">
-      <p:transition spd="slow" p14:dur="2000"/>
-    </mc:Choice>
-    <mc:Fallback xmlns="">
-      <p:transition spd="slow"/>
-    </mc:Fallback>
-  </mc:AlternateContent>
-  <p:timing>
-    <p:tnLst>
-      <p:par>
-        <p:cTn id="1" dur="indefinite" restart="never" nodeType="tmRoot"/>
-      </p:par>
-    </p:tnLst>
-  </p:timing>
 </p:sld>
 </file>
 
@@ -21132,15 +20802,15 @@
               <a:t>RNN. </a:t>
             </a:r>
             <a:r>
-              <a:rPr lang="ru-RU" b="1" dirty="0" smtClean="0"/>
+              <a:rPr lang="ru-RU" b="1" dirty="0"/>
               <a:t>Ограниченное</a:t>
             </a:r>
             <a:r>
-              <a:rPr lang="en-US" b="1" dirty="0" smtClean="0"/>
+              <a:rPr lang="en-US" b="1" dirty="0"/>
               <a:t> </a:t>
             </a:r>
             <a:r>
-              <a:rPr lang="ru-RU" b="1" dirty="0" smtClean="0"/>
+              <a:rPr lang="ru-RU" b="1" dirty="0"/>
               <a:t>обучение</a:t>
             </a:r>
             <a:endParaRPr lang="ru-RU" dirty="0"/>
@@ -21242,11 +20912,7 @@
                 </a:r>
                 <a:r>
                   <a:rPr lang="ru-RU" sz="2200" dirty="0"/>
-                  <a:t>должна быть ограничена</a:t>
-                </a:r>
-                <a:r>
-                  <a:rPr lang="ru-RU" sz="2200" dirty="0" smtClean="0"/>
-                  <a:t>.</a:t>
+                  <a:t>должна быть ограничена.</a:t>
                 </a:r>
               </a:p>
               <a:p>
@@ -21259,12 +20925,8 @@
                   </a:spcBef>
                 </a:pPr>
                 <a:r>
-                  <a:rPr lang="ru-RU" sz="2200" b="1" dirty="0" smtClean="0"/>
-                  <a:t>Усечение </a:t>
-                </a:r>
-                <a:r>
                   <a:rPr lang="ru-RU" sz="2200" b="1" dirty="0"/>
-                  <a:t>обучение </a:t>
+                  <a:t>Усечение обучение </a:t>
                 </a:r>
                 <a:r>
                   <a:rPr lang="ru-RU" sz="2200" dirty="0"/>
@@ -21350,13 +21012,7 @@
                               <a:rPr lang="en-US" sz="2200" i="1" dirty="0">
                                 <a:latin typeface="Cambria Math" panose="02040503050406030204" pitchFamily="18" charset="0"/>
                               </a:rPr>
-                              <m:t>+</m:t>
-                            </m:r>
-                            <m:r>
-                              <a:rPr lang="en-US" sz="2200" i="1" dirty="0">
-                                <a:latin typeface="Cambria Math" panose="02040503050406030204" pitchFamily="18" charset="0"/>
-                              </a:rPr>
-                              <m:t>1</m:t>
+                              <m:t>+1</m:t>
                             </m:r>
                           </m:sub>
                         </m:sSub>
@@ -21526,10 +21182,9 @@
                   <a:t> </a:t>
                 </a:r>
                 <a:r>
-                  <a:rPr lang="ru-RU" sz="2200" dirty="0" smtClean="0"/>
+                  <a:rPr lang="ru-RU" sz="2200" dirty="0"/>
                   <a:t>шагов</a:t>
                 </a:r>
-                <a:endParaRPr lang="ru-RU" sz="2200" dirty="0"/>
               </a:p>
               <a:p>
                 <a:pPr marL="342900" lvl="2" indent="-342900">
@@ -21545,34 +21200,30 @@
                   <a:t>G</a:t>
                 </a:r>
                 <a:r>
-                  <a:rPr lang="ru-RU" sz="2200" b="1" dirty="0" err="1" smtClean="0"/>
+                  <a:rPr lang="ru-RU" sz="2200" b="1" dirty="0" err="1"/>
                   <a:t>radient</a:t>
                 </a:r>
                 <a:r>
-                  <a:rPr lang="ru-RU" sz="2200" b="1" dirty="0" smtClean="0"/>
+                  <a:rPr lang="ru-RU" sz="2200" b="1" dirty="0"/>
                   <a:t> </a:t>
                 </a:r>
                 <a:r>
-                  <a:rPr lang="ru-RU" sz="2200" b="1" dirty="0" err="1" smtClean="0"/>
+                  <a:rPr lang="ru-RU" sz="2200" b="1" dirty="0" err="1"/>
                   <a:t>clipping</a:t>
                 </a:r>
                 <a:r>
-                  <a:rPr lang="en-US" sz="2200" b="1" dirty="0" smtClean="0"/>
+                  <a:rPr lang="en-US" sz="2200" b="1" dirty="0"/>
                   <a:t> </a:t>
                 </a:r>
                 <a:r>
-                  <a:rPr lang="en-US" sz="2200" dirty="0" smtClean="0"/>
+                  <a:rPr lang="en-US" sz="2200" dirty="0"/>
                   <a:t>– </a:t>
                 </a:r>
                 <a:r>
-                  <a:rPr lang="ru-RU" sz="2200" dirty="0" smtClean="0"/>
-                  <a:t>Ограничение максимально </a:t>
+                  <a:rPr lang="ru-RU" sz="2200" dirty="0"/>
+                  <a:t>Ограничение максимально возможное значение градиента и заменяет все значения выше выбранного порога на это значение. </a:t>
                 </a:r>
-                <a:r>
-                  <a:rPr lang="ru-RU" sz="2200" dirty="0"/>
-                  <a:t>возможное значение градиента и заменяет все значения выше выбранного порога на это значение. </a:t>
-                </a:r>
-                <a:endParaRPr lang="ru-RU" sz="2200" i="1" dirty="0" smtClean="0">
+                <a:endParaRPr lang="ru-RU" sz="2200" i="1" dirty="0">
                   <a:latin typeface="Cambria Math" panose="02040503050406030204" pitchFamily="18" charset="0"/>
                 </a:endParaRPr>
               </a:p>
@@ -21801,19 +21452,7 @@
                                 <a:rPr lang="en-US" sz="2200" i="1" dirty="0">
                                   <a:latin typeface="Cambria Math" panose="02040503050406030204" pitchFamily="18" charset="0"/>
                                 </a:rPr>
-                                <m:t>𝑜𝑡</m:t>
-                              </m:r>
-                              <m:r>
-                                <a:rPr lang="en-US" sz="2200" i="1" dirty="0">
-                                  <a:latin typeface="Cambria Math" panose="02040503050406030204" pitchFamily="18" charset="0"/>
-                                </a:rPr>
-                                <m:t>h</m:t>
-                              </m:r>
-                              <m:r>
-                                <a:rPr lang="en-US" sz="2200" i="1" dirty="0">
-                                  <a:latin typeface="Cambria Math" panose="02040503050406030204" pitchFamily="18" charset="0"/>
-                                </a:rPr>
-                                <m:t>𝑒𝑟𝑤𝑖𝑠𝑒</m:t>
+                                <m:t>𝑜𝑡h𝑒𝑟𝑤𝑖𝑠𝑒</m:t>
                               </m:r>
                             </m:e>
                           </m:eqArr>
@@ -22124,13 +21763,6 @@
   <p:clrMapOvr>
     <a:masterClrMapping/>
   </p:clrMapOvr>
-  <p:timing>
-    <p:tnLst>
-      <p:par>
-        <p:cTn id="1" dur="indefinite" restart="never" nodeType="tmRoot"/>
-      </p:par>
-    </p:tnLst>
-  </p:timing>
 </p:sld>
 </file>
 
